--- a/LabBook_10.pptx
+++ b/LabBook_10.pptx
@@ -5,10 +5,10 @@
     <p:sldMasterId id="2147483648" r:id="rId1"/>
   </p:sldMasterIdLst>
   <p:notesMasterIdLst>
-    <p:notesMasterId r:id="rId9"/>
+    <p:notesMasterId r:id="rId10"/>
   </p:notesMasterIdLst>
   <p:handoutMasterIdLst>
-    <p:handoutMasterId r:id="rId10"/>
+    <p:handoutMasterId r:id="rId11"/>
   </p:handoutMasterIdLst>
   <p:sldIdLst>
     <p:sldId id="256" r:id="rId2"/>
@@ -16,8 +16,9 @@
     <p:sldId id="290" r:id="rId4"/>
     <p:sldId id="292" r:id="rId5"/>
     <p:sldId id="297" r:id="rId6"/>
-    <p:sldId id="293" r:id="rId7"/>
-    <p:sldId id="288" r:id="rId8"/>
+    <p:sldId id="298" r:id="rId7"/>
+    <p:sldId id="293" r:id="rId8"/>
+    <p:sldId id="288" r:id="rId9"/>
   </p:sldIdLst>
   <p:sldSz cx="12192000" cy="6858000"/>
   <p:notesSz cx="12192000" cy="6858000"/>
@@ -138,166 +139,6 @@
 </p:presentation>
 </file>
 
-<file path=ppt/revisionInfo.xml><?xml version="1.0" encoding="utf-8"?>
-<p1510:revInfo xmlns:a="http://schemas.openxmlformats.org/drawingml/2006/main" xmlns:r="http://schemas.openxmlformats.org/officeDocument/2006/relationships" xmlns:p1510="http://schemas.microsoft.com/office/powerpoint/2015/10/main">
-  <p1510:revLst>
-    <p1510:client id="{7243A380-F68D-4B97-8CF0-04FACEB71A64}" v="8" dt="2026-02-16T10:00:04.333"/>
-  </p1510:revLst>
-</p1510:revInfo>
-</file>
-
-<file path=ppt/changesInfos/changesInfo1.xml><?xml version="1.0" encoding="utf-8"?>
-<pc:chgInfo xmlns:a="http://schemas.openxmlformats.org/drawingml/2006/main" xmlns:r="http://schemas.openxmlformats.org/officeDocument/2006/relationships" xmlns:ac="http://schemas.microsoft.com/office/drawing/2013/main/command" xmlns:pc="http://schemas.microsoft.com/office/powerpoint/2013/main/command">
-  <pc:docChgLst>
-    <pc:chgData name="Christian Camilo Cano Vasquez" userId="8c73a2a4-758b-4e34-81ed-39462e48bd92" providerId="ADAL" clId="{E6287060-0277-4BCC-9556-78F4A9113EC4}"/>
-    <pc:docChg chg="custSel addSld delSld modSld">
-      <pc:chgData name="Christian Camilo Cano Vasquez" userId="8c73a2a4-758b-4e34-81ed-39462e48bd92" providerId="ADAL" clId="{E6287060-0277-4BCC-9556-78F4A9113EC4}" dt="2026-02-16T10:00:04.333" v="112"/>
-      <pc:docMkLst>
-        <pc:docMk/>
-      </pc:docMkLst>
-      <pc:sldChg chg="addSp delSp modSp mod">
-        <pc:chgData name="Christian Camilo Cano Vasquez" userId="8c73a2a4-758b-4e34-81ed-39462e48bd92" providerId="ADAL" clId="{E6287060-0277-4BCC-9556-78F4A9113EC4}" dt="2026-02-16T09:54:36.314" v="109" actId="20577"/>
-        <pc:sldMkLst>
-          <pc:docMk/>
-          <pc:sldMk cId="730501311" sldId="290"/>
-        </pc:sldMkLst>
-        <pc:spChg chg="add mod">
-          <ac:chgData name="Christian Camilo Cano Vasquez" userId="8c73a2a4-758b-4e34-81ed-39462e48bd92" providerId="ADAL" clId="{E6287060-0277-4BCC-9556-78F4A9113EC4}" dt="2026-02-16T09:48:48.742" v="10" actId="1076"/>
-          <ac:spMkLst>
-            <pc:docMk/>
-            <pc:sldMk cId="730501311" sldId="290"/>
-            <ac:spMk id="2" creationId="{029F2FF9-FEB4-7AA3-B3B4-EFA9CFA0E230}"/>
-          </ac:spMkLst>
-        </pc:spChg>
-        <pc:spChg chg="add mod">
-          <ac:chgData name="Christian Camilo Cano Vasquez" userId="8c73a2a4-758b-4e34-81ed-39462e48bd92" providerId="ADAL" clId="{E6287060-0277-4BCC-9556-78F4A9113EC4}" dt="2026-02-16T09:49:37.395" v="33" actId="20577"/>
-          <ac:spMkLst>
-            <pc:docMk/>
-            <pc:sldMk cId="730501311" sldId="290"/>
-            <ac:spMk id="4" creationId="{C2C94B57-6111-4070-F6BA-8C3B9C305618}"/>
-          </ac:spMkLst>
-        </pc:spChg>
-        <pc:spChg chg="del">
-          <ac:chgData name="Christian Camilo Cano Vasquez" userId="8c73a2a4-758b-4e34-81ed-39462e48bd92" providerId="ADAL" clId="{E6287060-0277-4BCC-9556-78F4A9113EC4}" dt="2026-02-16T09:48:32.837" v="5" actId="478"/>
-          <ac:spMkLst>
-            <pc:docMk/>
-            <pc:sldMk cId="730501311" sldId="290"/>
-            <ac:spMk id="7" creationId="{F917B3AA-589C-A90A-EE95-EE60C6D04663}"/>
-          </ac:spMkLst>
-        </pc:spChg>
-        <pc:spChg chg="del">
-          <ac:chgData name="Christian Camilo Cano Vasquez" userId="8c73a2a4-758b-4e34-81ed-39462e48bd92" providerId="ADAL" clId="{E6287060-0277-4BCC-9556-78F4A9113EC4}" dt="2026-02-16T09:48:32.837" v="5" actId="478"/>
-          <ac:spMkLst>
-            <pc:docMk/>
-            <pc:sldMk cId="730501311" sldId="290"/>
-            <ac:spMk id="9" creationId="{793F5757-34AB-6F24-0981-9F1F15A0ADF8}"/>
-          </ac:spMkLst>
-        </pc:spChg>
-        <pc:spChg chg="del">
-          <ac:chgData name="Christian Camilo Cano Vasquez" userId="8c73a2a4-758b-4e34-81ed-39462e48bd92" providerId="ADAL" clId="{E6287060-0277-4BCC-9556-78F4A9113EC4}" dt="2026-02-16T09:48:35.096" v="6" actId="478"/>
-          <ac:spMkLst>
-            <pc:docMk/>
-            <pc:sldMk cId="730501311" sldId="290"/>
-            <ac:spMk id="11" creationId="{8BD4C233-B5D9-B6AA-93A8-CF2F130CFF9C}"/>
-          </ac:spMkLst>
-        </pc:spChg>
-        <pc:spChg chg="mod">
-          <ac:chgData name="Christian Camilo Cano Vasquez" userId="8c73a2a4-758b-4e34-81ed-39462e48bd92" providerId="ADAL" clId="{E6287060-0277-4BCC-9556-78F4A9113EC4}" dt="2026-02-16T09:54:36.314" v="109" actId="20577"/>
-          <ac:spMkLst>
-            <pc:docMk/>
-            <pc:sldMk cId="730501311" sldId="290"/>
-            <ac:spMk id="16" creationId="{471E1424-6C4B-2D9A-1352-30AFB987AD41}"/>
-          </ac:spMkLst>
-        </pc:spChg>
-      </pc:sldChg>
-      <pc:sldChg chg="modSp add del mod">
-        <pc:chgData name="Christian Camilo Cano Vasquez" userId="8c73a2a4-758b-4e34-81ed-39462e48bd92" providerId="ADAL" clId="{E6287060-0277-4BCC-9556-78F4A9113EC4}" dt="2026-02-16T09:54:44.707" v="111" actId="20577"/>
-        <pc:sldMkLst>
-          <pc:docMk/>
-          <pc:sldMk cId="2900117438" sldId="292"/>
-        </pc:sldMkLst>
-        <pc:spChg chg="mod">
-          <ac:chgData name="Christian Camilo Cano Vasquez" userId="8c73a2a4-758b-4e34-81ed-39462e48bd92" providerId="ADAL" clId="{E6287060-0277-4BCC-9556-78F4A9113EC4}" dt="2026-02-16T09:51:39.768" v="80" actId="313"/>
-          <ac:spMkLst>
-            <pc:docMk/>
-            <pc:sldMk cId="2900117438" sldId="292"/>
-            <ac:spMk id="2" creationId="{82A62DD6-5488-72A1-9926-0CAEE59089A9}"/>
-          </ac:spMkLst>
-        </pc:spChg>
-        <pc:spChg chg="mod">
-          <ac:chgData name="Christian Camilo Cano Vasquez" userId="8c73a2a4-758b-4e34-81ed-39462e48bd92" providerId="ADAL" clId="{E6287060-0277-4BCC-9556-78F4A9113EC4}" dt="2026-02-16T09:54:44.707" v="111" actId="20577"/>
-          <ac:spMkLst>
-            <pc:docMk/>
-            <pc:sldMk cId="2900117438" sldId="292"/>
-            <ac:spMk id="16" creationId="{6AA2E789-F7AE-F068-274C-E0F13A22DBCA}"/>
-          </ac:spMkLst>
-        </pc:spChg>
-      </pc:sldChg>
-      <pc:sldChg chg="modSp add del mod">
-        <pc:chgData name="Christian Camilo Cano Vasquez" userId="8c73a2a4-758b-4e34-81ed-39462e48bd92" providerId="ADAL" clId="{E6287060-0277-4BCC-9556-78F4A9113EC4}" dt="2026-02-16T09:50:51.822" v="37" actId="20577"/>
-        <pc:sldMkLst>
-          <pc:docMk/>
-          <pc:sldMk cId="3660438245" sldId="293"/>
-        </pc:sldMkLst>
-        <pc:spChg chg="mod">
-          <ac:chgData name="Christian Camilo Cano Vasquez" userId="8c73a2a4-758b-4e34-81ed-39462e48bd92" providerId="ADAL" clId="{E6287060-0277-4BCC-9556-78F4A9113EC4}" dt="2026-02-16T09:45:25.127" v="4" actId="115"/>
-          <ac:spMkLst>
-            <pc:docMk/>
-            <pc:sldMk cId="3660438245" sldId="293"/>
-            <ac:spMk id="2" creationId="{FDE3A197-9508-F9F1-1FEB-FF883D78C151}"/>
-          </ac:spMkLst>
-        </pc:spChg>
-        <pc:spChg chg="mod">
-          <ac:chgData name="Christian Camilo Cano Vasquez" userId="8c73a2a4-758b-4e34-81ed-39462e48bd92" providerId="ADAL" clId="{E6287060-0277-4BCC-9556-78F4A9113EC4}" dt="2026-02-16T09:50:51.822" v="37" actId="20577"/>
-          <ac:spMkLst>
-            <pc:docMk/>
-            <pc:sldMk cId="3660438245" sldId="293"/>
-            <ac:spMk id="16" creationId="{742C31CE-19F0-B995-0997-9A2D6A879BF7}"/>
-          </ac:spMkLst>
-        </pc:spChg>
-      </pc:sldChg>
-      <pc:sldChg chg="modSp mod">
-        <pc:chgData name="Christian Camilo Cano Vasquez" userId="8c73a2a4-758b-4e34-81ed-39462e48bd92" providerId="ADAL" clId="{E6287060-0277-4BCC-9556-78F4A9113EC4}" dt="2026-02-16T10:00:04.333" v="112"/>
-        <pc:sldMkLst>
-          <pc:docMk/>
-          <pc:sldMk cId="473922805" sldId="295"/>
-        </pc:sldMkLst>
-        <pc:spChg chg="mod">
-          <ac:chgData name="Christian Camilo Cano Vasquez" userId="8c73a2a4-758b-4e34-81ed-39462e48bd92" providerId="ADAL" clId="{E6287060-0277-4BCC-9556-78F4A9113EC4}" dt="2026-02-16T10:00:04.333" v="112"/>
-          <ac:spMkLst>
-            <pc:docMk/>
-            <pc:sldMk cId="473922805" sldId="295"/>
-            <ac:spMk id="4" creationId="{9F7BC140-B3D8-C3CB-55AD-9064C7CDE9CA}"/>
-          </ac:spMkLst>
-        </pc:spChg>
-      </pc:sldChg>
-      <pc:sldChg chg="del">
-        <pc:chgData name="Christian Camilo Cano Vasquez" userId="8c73a2a4-758b-4e34-81ed-39462e48bd92" providerId="ADAL" clId="{E6287060-0277-4BCC-9556-78F4A9113EC4}" dt="2026-02-16T09:50:39.931" v="34" actId="47"/>
-        <pc:sldMkLst>
-          <pc:docMk/>
-          <pc:sldMk cId="1245186850" sldId="296"/>
-        </pc:sldMkLst>
-      </pc:sldChg>
-      <pc:sldChg chg="modSp add del">
-        <pc:chgData name="Christian Camilo Cano Vasquez" userId="8c73a2a4-758b-4e34-81ed-39462e48bd92" providerId="ADAL" clId="{E6287060-0277-4BCC-9556-78F4A9113EC4}" dt="2026-02-16T09:50:57.288" v="39" actId="20577"/>
-        <pc:sldMkLst>
-          <pc:docMk/>
-          <pc:sldMk cId="236054401" sldId="297"/>
-        </pc:sldMkLst>
-        <pc:spChg chg="mod">
-          <ac:chgData name="Christian Camilo Cano Vasquez" userId="8c73a2a4-758b-4e34-81ed-39462e48bd92" providerId="ADAL" clId="{E6287060-0277-4BCC-9556-78F4A9113EC4}" dt="2026-02-16T09:50:57.288" v="39" actId="20577"/>
-          <ac:spMkLst>
-            <pc:docMk/>
-            <pc:sldMk cId="236054401" sldId="297"/>
-            <ac:spMk id="16" creationId="{394400B4-EE16-8E85-AB54-E82FE3B29345}"/>
-          </ac:spMkLst>
-        </pc:spChg>
-      </pc:sldChg>
-    </pc:docChg>
-  </pc:docChgLst>
-</pc:chgInfo>
-</file>
-
 <file path=ppt/handoutMasters/handoutMaster1.xml><?xml version="1.0" encoding="utf-8"?>
 <p:handoutMaster xmlns:a="http://schemas.openxmlformats.org/drawingml/2006/main" xmlns:r="http://schemas.openxmlformats.org/officeDocument/2006/relationships" xmlns:p="http://schemas.openxmlformats.org/presentationml/2006/main">
   <p:cSld>
@@ -1225,7 +1066,7 @@
           <a:p>
             <a:fld id="{676223B9-C868-4436-87D9-1A3152E1157A}" type="slidenum">
               <a:rPr lang="es-ES" smtClean="0"/>
-              <a:t>6</a:t>
+              <a:t>7</a:t>
             </a:fld>
             <a:endParaRPr lang="es-ES"/>
           </a:p>
@@ -5020,65 +4861,6 @@
       </p:sp>
       <p:sp>
         <p:nvSpPr>
-          <p:cNvPr id="8" name="CuadroTexto 7">
-            <a:extLst>
-              <a:ext uri="{FF2B5EF4-FFF2-40B4-BE49-F238E27FC236}">
-                <a16:creationId xmlns:a16="http://schemas.microsoft.com/office/drawing/2014/main" id="{53A5ECC9-91D2-2918-1681-822F99EB31CD}"/>
-              </a:ext>
-            </a:extLst>
-          </p:cNvPr>
-          <p:cNvSpPr txBox="1"/>
-          <p:nvPr/>
-        </p:nvSpPr>
-        <p:spPr>
-          <a:xfrm>
-            <a:off x="1079403" y="2709096"/>
-            <a:ext cx="4546634" cy="923330"/>
-          </a:xfrm>
-          <a:prstGeom prst="rect">
-            <a:avLst/>
-          </a:prstGeom>
-          <a:noFill/>
-        </p:spPr>
-        <p:txBody>
-          <a:bodyPr wrap="square" rtlCol="0">
-            <a:spAutoFit/>
-          </a:bodyPr>
-          <a:lstStyle/>
-          <a:p>
-            <a:pPr algn="ctr"/>
-            <a:r>
-              <a:rPr lang="en-US" b="1" dirty="0"/>
-              <a:t>deep</a:t>
-            </a:r>
-            <a:r>
-              <a:rPr lang="en-US" dirty="0"/>
-              <a:t> waveguide</a:t>
-            </a:r>
-          </a:p>
-          <a:p>
-            <a:pPr algn="ctr"/>
-            <a:endParaRPr lang="en-US" dirty="0"/>
-          </a:p>
-          <a:p>
-            <a:pPr algn="ctr"/>
-            <a:r>
-              <a:rPr lang="en-US" dirty="0"/>
-              <a:t>Paste neff_TE0 vs </a:t>
-            </a:r>
-            <a:r>
-              <a:rPr lang="en-US" dirty="0" err="1"/>
-              <a:t>grid_resolution</a:t>
-            </a:r>
-            <a:r>
-              <a:rPr lang="en-US" dirty="0"/>
-              <a:t> plot here</a:t>
-            </a:r>
-          </a:p>
-        </p:txBody>
-      </p:sp>
-      <p:sp>
-        <p:nvSpPr>
           <p:cNvPr id="10" name="CuadroTexto 9">
             <a:extLst>
               <a:ext uri="{FF2B5EF4-FFF2-40B4-BE49-F238E27FC236}">
@@ -5116,11 +4898,270 @@
           <a:p>
             <a:pPr algn="just"/>
             <a:r>
-              <a:rPr lang="en-US" sz="1200" dirty="0">
-                <a:latin typeface="Arial" panose="020B0604020202020204" pitchFamily="34" charset="0"/>
-                <a:cs typeface="Arial" panose="020B0604020202020204" pitchFamily="34" charset="0"/>
-              </a:rPr>
-              <a:t>Comment results, determine above which grid value the effective index calculation does not change significantly</a:t>
+              <a:rPr lang="en-US" sz="1200" dirty="0" err="1">
+                <a:latin typeface="Arial" panose="020B0604020202020204" pitchFamily="34" charset="0"/>
+                <a:cs typeface="Arial" panose="020B0604020202020204" pitchFamily="34" charset="0"/>
+              </a:rPr>
+              <a:t>Viendo</a:t>
+            </a:r>
+            <a:r>
+              <a:rPr lang="en-US" sz="1200" dirty="0">
+                <a:latin typeface="Arial" panose="020B0604020202020204" pitchFamily="34" charset="0"/>
+                <a:cs typeface="Arial" panose="020B0604020202020204" pitchFamily="34" charset="0"/>
+              </a:rPr>
+              <a:t> la </a:t>
+            </a:r>
+            <a:r>
+              <a:rPr lang="en-US" sz="1200" dirty="0" err="1">
+                <a:latin typeface="Arial" panose="020B0604020202020204" pitchFamily="34" charset="0"/>
+                <a:cs typeface="Arial" panose="020B0604020202020204" pitchFamily="34" charset="0"/>
+              </a:rPr>
+              <a:t>primera</a:t>
+            </a:r>
+            <a:r>
+              <a:rPr lang="en-US" sz="1200" dirty="0">
+                <a:latin typeface="Arial" panose="020B0604020202020204" pitchFamily="34" charset="0"/>
+                <a:cs typeface="Arial" panose="020B0604020202020204" pitchFamily="34" charset="0"/>
+              </a:rPr>
+              <a:t> </a:t>
+            </a:r>
+            <a:r>
+              <a:rPr lang="en-US" sz="1200" dirty="0" err="1">
+                <a:latin typeface="Arial" panose="020B0604020202020204" pitchFamily="34" charset="0"/>
+                <a:cs typeface="Arial" panose="020B0604020202020204" pitchFamily="34" charset="0"/>
+              </a:rPr>
+              <a:t>gráfica</a:t>
+            </a:r>
+            <a:r>
+              <a:rPr lang="en-US" sz="1200" dirty="0">
+                <a:latin typeface="Arial" panose="020B0604020202020204" pitchFamily="34" charset="0"/>
+                <a:cs typeface="Arial" panose="020B0604020202020204" pitchFamily="34" charset="0"/>
+              </a:rPr>
+              <a:t> </a:t>
+            </a:r>
+            <a:r>
+              <a:rPr lang="en-US" sz="1200" dirty="0" err="1">
+                <a:latin typeface="Arial" panose="020B0604020202020204" pitchFamily="34" charset="0"/>
+                <a:cs typeface="Arial" panose="020B0604020202020204" pitchFamily="34" charset="0"/>
+              </a:rPr>
+              <a:t>donde</a:t>
+            </a:r>
+            <a:r>
+              <a:rPr lang="en-US" sz="1200" dirty="0">
+                <a:latin typeface="Arial" panose="020B0604020202020204" pitchFamily="34" charset="0"/>
+                <a:cs typeface="Arial" panose="020B0604020202020204" pitchFamily="34" charset="0"/>
+              </a:rPr>
+              <a:t> se </a:t>
+            </a:r>
+            <a:r>
+              <a:rPr lang="en-US" sz="1200" dirty="0" err="1">
+                <a:latin typeface="Arial" panose="020B0604020202020204" pitchFamily="34" charset="0"/>
+                <a:cs typeface="Arial" panose="020B0604020202020204" pitchFamily="34" charset="0"/>
+              </a:rPr>
+              <a:t>muestran</a:t>
+            </a:r>
+            <a:r>
+              <a:rPr lang="en-US" sz="1200" dirty="0">
+                <a:latin typeface="Arial" panose="020B0604020202020204" pitchFamily="34" charset="0"/>
+                <a:cs typeface="Arial" panose="020B0604020202020204" pitchFamily="34" charset="0"/>
+              </a:rPr>
+              <a:t> los </a:t>
+            </a:r>
+            <a:r>
+              <a:rPr lang="en-US" sz="1200" dirty="0" err="1">
+                <a:latin typeface="Arial" panose="020B0604020202020204" pitchFamily="34" charset="0"/>
+                <a:cs typeface="Arial" panose="020B0604020202020204" pitchFamily="34" charset="0"/>
+              </a:rPr>
+              <a:t>n_eff</a:t>
+            </a:r>
+            <a:r>
+              <a:rPr lang="en-US" sz="1200" dirty="0">
+                <a:latin typeface="Arial" panose="020B0604020202020204" pitchFamily="34" charset="0"/>
+                <a:cs typeface="Arial" panose="020B0604020202020204" pitchFamily="34" charset="0"/>
+              </a:rPr>
+              <a:t> </a:t>
+            </a:r>
+            <a:r>
+              <a:rPr lang="en-US" sz="1200" dirty="0" err="1">
+                <a:latin typeface="Arial" panose="020B0604020202020204" pitchFamily="34" charset="0"/>
+                <a:cs typeface="Arial" panose="020B0604020202020204" pitchFamily="34" charset="0"/>
+              </a:rPr>
+              <a:t>dependiendo</a:t>
+            </a:r>
+            <a:r>
+              <a:rPr lang="en-US" sz="1200" dirty="0">
+                <a:latin typeface="Arial" panose="020B0604020202020204" pitchFamily="34" charset="0"/>
+                <a:cs typeface="Arial" panose="020B0604020202020204" pitchFamily="34" charset="0"/>
+              </a:rPr>
+              <a:t> de la </a:t>
+            </a:r>
+            <a:r>
+              <a:rPr lang="en-US" sz="1200" dirty="0" err="1">
+                <a:latin typeface="Arial" panose="020B0604020202020204" pitchFamily="34" charset="0"/>
+                <a:cs typeface="Arial" panose="020B0604020202020204" pitchFamily="34" charset="0"/>
+              </a:rPr>
+              <a:t>resolución</a:t>
+            </a:r>
+            <a:r>
+              <a:rPr lang="en-US" sz="1200" dirty="0">
+                <a:latin typeface="Arial" panose="020B0604020202020204" pitchFamily="34" charset="0"/>
+                <a:cs typeface="Arial" panose="020B0604020202020204" pitchFamily="34" charset="0"/>
+              </a:rPr>
+              <a:t> </a:t>
+            </a:r>
+            <a:r>
+              <a:rPr lang="en-US" sz="1200" dirty="0" err="1">
+                <a:latin typeface="Arial" panose="020B0604020202020204" pitchFamily="34" charset="0"/>
+                <a:cs typeface="Arial" panose="020B0604020202020204" pitchFamily="34" charset="0"/>
+              </a:rPr>
+              <a:t>obtenemos</a:t>
+            </a:r>
+            <a:r>
+              <a:rPr lang="en-US" sz="1200" dirty="0">
+                <a:latin typeface="Arial" panose="020B0604020202020204" pitchFamily="34" charset="0"/>
+                <a:cs typeface="Arial" panose="020B0604020202020204" pitchFamily="34" charset="0"/>
+              </a:rPr>
+              <a:t> </a:t>
+            </a:r>
+            <a:r>
+              <a:rPr lang="en-US" sz="1200" dirty="0" err="1">
+                <a:latin typeface="Arial" panose="020B0604020202020204" pitchFamily="34" charset="0"/>
+                <a:cs typeface="Arial" panose="020B0604020202020204" pitchFamily="34" charset="0"/>
+              </a:rPr>
+              <a:t>unos</a:t>
+            </a:r>
+            <a:r>
+              <a:rPr lang="en-US" sz="1200" dirty="0">
+                <a:latin typeface="Arial" panose="020B0604020202020204" pitchFamily="34" charset="0"/>
+                <a:cs typeface="Arial" panose="020B0604020202020204" pitchFamily="34" charset="0"/>
+              </a:rPr>
+              <a:t> </a:t>
+            </a:r>
+            <a:r>
+              <a:rPr lang="en-US" sz="1200" dirty="0" err="1">
+                <a:latin typeface="Arial" panose="020B0604020202020204" pitchFamily="34" charset="0"/>
+                <a:cs typeface="Arial" panose="020B0604020202020204" pitchFamily="34" charset="0"/>
+              </a:rPr>
+              <a:t>valores</a:t>
+            </a:r>
+            <a:r>
+              <a:rPr lang="en-US" sz="1200" dirty="0">
+                <a:latin typeface="Arial" panose="020B0604020202020204" pitchFamily="34" charset="0"/>
+                <a:cs typeface="Arial" panose="020B0604020202020204" pitchFamily="34" charset="0"/>
+              </a:rPr>
+              <a:t> </a:t>
+            </a:r>
+            <a:r>
+              <a:rPr lang="en-US" sz="1200" dirty="0" err="1">
+                <a:latin typeface="Arial" panose="020B0604020202020204" pitchFamily="34" charset="0"/>
+                <a:cs typeface="Arial" panose="020B0604020202020204" pitchFamily="34" charset="0"/>
+              </a:rPr>
+              <a:t>casi</a:t>
+            </a:r>
+            <a:r>
+              <a:rPr lang="en-US" sz="1200" dirty="0">
+                <a:latin typeface="Arial" panose="020B0604020202020204" pitchFamily="34" charset="0"/>
+                <a:cs typeface="Arial" panose="020B0604020202020204" pitchFamily="34" charset="0"/>
+              </a:rPr>
+              <a:t> </a:t>
+            </a:r>
+            <a:r>
+              <a:rPr lang="en-US" sz="1200" dirty="0" err="1">
+                <a:latin typeface="Arial" panose="020B0604020202020204" pitchFamily="34" charset="0"/>
+                <a:cs typeface="Arial" panose="020B0604020202020204" pitchFamily="34" charset="0"/>
+              </a:rPr>
+              <a:t>constantes</a:t>
+            </a:r>
+            <a:r>
+              <a:rPr lang="en-US" sz="1200" dirty="0">
+                <a:latin typeface="Arial" panose="020B0604020202020204" pitchFamily="34" charset="0"/>
+                <a:cs typeface="Arial" panose="020B0604020202020204" pitchFamily="34" charset="0"/>
+              </a:rPr>
+              <a:t> a </a:t>
+            </a:r>
+            <a:r>
+              <a:rPr lang="en-US" sz="1200" dirty="0" err="1">
+                <a:latin typeface="Arial" panose="020B0604020202020204" pitchFamily="34" charset="0"/>
+                <a:cs typeface="Arial" panose="020B0604020202020204" pitchFamily="34" charset="0"/>
+              </a:rPr>
+              <a:t>partir</a:t>
+            </a:r>
+            <a:r>
+              <a:rPr lang="en-US" sz="1200" dirty="0">
+                <a:latin typeface="Arial" panose="020B0604020202020204" pitchFamily="34" charset="0"/>
+                <a:cs typeface="Arial" panose="020B0604020202020204" pitchFamily="34" charset="0"/>
+              </a:rPr>
+              <a:t> de 50 de </a:t>
+            </a:r>
+            <a:r>
+              <a:rPr lang="en-US" sz="1200" dirty="0" err="1">
+                <a:latin typeface="Arial" panose="020B0604020202020204" pitchFamily="34" charset="0"/>
+                <a:cs typeface="Arial" panose="020B0604020202020204" pitchFamily="34" charset="0"/>
+              </a:rPr>
+              <a:t>resolución</a:t>
+            </a:r>
+            <a:r>
+              <a:rPr lang="en-US" sz="1200" dirty="0">
+                <a:latin typeface="Arial" panose="020B0604020202020204" pitchFamily="34" charset="0"/>
+                <a:cs typeface="Arial" panose="020B0604020202020204" pitchFamily="34" charset="0"/>
+              </a:rPr>
+              <a:t>. Sin embargo, para que no </a:t>
+            </a:r>
+            <a:r>
+              <a:rPr lang="en-US" sz="1200" dirty="0" err="1">
+                <a:latin typeface="Arial" panose="020B0604020202020204" pitchFamily="34" charset="0"/>
+                <a:cs typeface="Arial" panose="020B0604020202020204" pitchFamily="34" charset="0"/>
+              </a:rPr>
+              <a:t>cueste</a:t>
+            </a:r>
+            <a:r>
+              <a:rPr lang="en-US" sz="1200" dirty="0">
+                <a:latin typeface="Arial" panose="020B0604020202020204" pitchFamily="34" charset="0"/>
+                <a:cs typeface="Arial" panose="020B0604020202020204" pitchFamily="34" charset="0"/>
+              </a:rPr>
+              <a:t> tanto </a:t>
+            </a:r>
+            <a:r>
+              <a:rPr lang="en-US" sz="1200" dirty="0" err="1">
+                <a:latin typeface="Arial" panose="020B0604020202020204" pitchFamily="34" charset="0"/>
+                <a:cs typeface="Arial" panose="020B0604020202020204" pitchFamily="34" charset="0"/>
+              </a:rPr>
+              <a:t>computacionalmente</a:t>
+            </a:r>
+            <a:r>
+              <a:rPr lang="en-US" sz="1200" dirty="0">
+                <a:latin typeface="Arial" panose="020B0604020202020204" pitchFamily="34" charset="0"/>
+                <a:cs typeface="Arial" panose="020B0604020202020204" pitchFamily="34" charset="0"/>
+              </a:rPr>
+              <a:t> </a:t>
+            </a:r>
+            <a:r>
+              <a:rPr lang="en-US" sz="1200" dirty="0" err="1">
+                <a:latin typeface="Arial" panose="020B0604020202020204" pitchFamily="34" charset="0"/>
+                <a:cs typeface="Arial" panose="020B0604020202020204" pitchFamily="34" charset="0"/>
+              </a:rPr>
+              <a:t>escogemos</a:t>
+            </a:r>
+            <a:r>
+              <a:rPr lang="en-US" sz="1200" dirty="0">
+                <a:latin typeface="Arial" panose="020B0604020202020204" pitchFamily="34" charset="0"/>
+                <a:cs typeface="Arial" panose="020B0604020202020204" pitchFamily="34" charset="0"/>
+              </a:rPr>
+              <a:t> </a:t>
+            </a:r>
+            <a:r>
+              <a:rPr lang="en-US" sz="1200" dirty="0" err="1">
+                <a:latin typeface="Arial" panose="020B0604020202020204" pitchFamily="34" charset="0"/>
+                <a:cs typeface="Arial" panose="020B0604020202020204" pitchFamily="34" charset="0"/>
+              </a:rPr>
+              <a:t>el</a:t>
+            </a:r>
+            <a:r>
+              <a:rPr lang="en-US" sz="1200" dirty="0">
+                <a:latin typeface="Arial" panose="020B0604020202020204" pitchFamily="34" charset="0"/>
+                <a:cs typeface="Arial" panose="020B0604020202020204" pitchFamily="34" charset="0"/>
+              </a:rPr>
+              <a:t> valor de 20.</a:t>
             </a:r>
           </a:p>
           <a:p>
@@ -5132,10 +5173,272 @@
           </a:p>
           <a:p>
             <a:pPr algn="just"/>
-            <a:endParaRPr lang="en-US" sz="1200" dirty="0">
-              <a:latin typeface="Arial" panose="020B0604020202020204" pitchFamily="34" charset="0"/>
-              <a:cs typeface="Arial" panose="020B0604020202020204" pitchFamily="34" charset="0"/>
-            </a:endParaRPr>
+            <a:r>
+              <a:rPr lang="en-US" sz="1200" dirty="0" err="1">
+                <a:latin typeface="Arial" panose="020B0604020202020204" pitchFamily="34" charset="0"/>
+                <a:cs typeface="Arial" panose="020B0604020202020204" pitchFamily="34" charset="0"/>
+              </a:rPr>
+              <a:t>Luego</a:t>
+            </a:r>
+            <a:r>
+              <a:rPr lang="en-US" sz="1200" dirty="0">
+                <a:latin typeface="Arial" panose="020B0604020202020204" pitchFamily="34" charset="0"/>
+                <a:cs typeface="Arial" panose="020B0604020202020204" pitchFamily="34" charset="0"/>
+              </a:rPr>
+              <a:t> </a:t>
+            </a:r>
+            <a:r>
+              <a:rPr lang="en-US" sz="1200" dirty="0" err="1">
+                <a:latin typeface="Arial" panose="020B0604020202020204" pitchFamily="34" charset="0"/>
+                <a:cs typeface="Arial" panose="020B0604020202020204" pitchFamily="34" charset="0"/>
+              </a:rPr>
+              <a:t>este</a:t>
+            </a:r>
+            <a:r>
+              <a:rPr lang="en-US" sz="1200" dirty="0">
+                <a:latin typeface="Arial" panose="020B0604020202020204" pitchFamily="34" charset="0"/>
+                <a:cs typeface="Arial" panose="020B0604020202020204" pitchFamily="34" charset="0"/>
+              </a:rPr>
+              <a:t> valor se </a:t>
+            </a:r>
+            <a:r>
+              <a:rPr lang="en-US" sz="1200" dirty="0" err="1">
+                <a:latin typeface="Arial" panose="020B0604020202020204" pitchFamily="34" charset="0"/>
+                <a:cs typeface="Arial" panose="020B0604020202020204" pitchFamily="34" charset="0"/>
+              </a:rPr>
+              <a:t>fija</a:t>
+            </a:r>
+            <a:r>
+              <a:rPr lang="en-US" sz="1200" dirty="0">
+                <a:latin typeface="Arial" panose="020B0604020202020204" pitchFamily="34" charset="0"/>
+                <a:cs typeface="Arial" panose="020B0604020202020204" pitchFamily="34" charset="0"/>
+              </a:rPr>
+              <a:t> y se </a:t>
+            </a:r>
+            <a:r>
+              <a:rPr lang="en-US" sz="1200" dirty="0" err="1">
+                <a:latin typeface="Arial" panose="020B0604020202020204" pitchFamily="34" charset="0"/>
+                <a:cs typeface="Arial" panose="020B0604020202020204" pitchFamily="34" charset="0"/>
+              </a:rPr>
+              <a:t>calcula</a:t>
+            </a:r>
+            <a:r>
+              <a:rPr lang="en-US" sz="1200" dirty="0">
+                <a:latin typeface="Arial" panose="020B0604020202020204" pitchFamily="34" charset="0"/>
+                <a:cs typeface="Arial" panose="020B0604020202020204" pitchFamily="34" charset="0"/>
+              </a:rPr>
+              <a:t> la </a:t>
+            </a:r>
+            <a:r>
+              <a:rPr lang="en-US" sz="1200" dirty="0" err="1">
+                <a:latin typeface="Arial" panose="020B0604020202020204" pitchFamily="34" charset="0"/>
+                <a:cs typeface="Arial" panose="020B0604020202020204" pitchFamily="34" charset="0"/>
+              </a:rPr>
+              <a:t>dependencia</a:t>
+            </a:r>
+            <a:r>
+              <a:rPr lang="en-US" sz="1200" dirty="0">
+                <a:latin typeface="Arial" panose="020B0604020202020204" pitchFamily="34" charset="0"/>
+                <a:cs typeface="Arial" panose="020B0604020202020204" pitchFamily="34" charset="0"/>
+              </a:rPr>
+              <a:t> del </a:t>
+            </a:r>
+            <a:r>
+              <a:rPr lang="en-US" sz="1200" dirty="0" err="1">
+                <a:latin typeface="Arial" panose="020B0604020202020204" pitchFamily="34" charset="0"/>
+                <a:cs typeface="Arial" panose="020B0604020202020204" pitchFamily="34" charset="0"/>
+              </a:rPr>
+              <a:t>n_eff</a:t>
+            </a:r>
+            <a:r>
+              <a:rPr lang="en-US" sz="1200" dirty="0">
+                <a:latin typeface="Arial" panose="020B0604020202020204" pitchFamily="34" charset="0"/>
+                <a:cs typeface="Arial" panose="020B0604020202020204" pitchFamily="34" charset="0"/>
+              </a:rPr>
+              <a:t> con </a:t>
+            </a:r>
+            <a:r>
+              <a:rPr lang="en-US" sz="1200" dirty="0" err="1">
+                <a:latin typeface="Arial" panose="020B0604020202020204" pitchFamily="34" charset="0"/>
+                <a:cs typeface="Arial" panose="020B0604020202020204" pitchFamily="34" charset="0"/>
+              </a:rPr>
+              <a:t>el</a:t>
+            </a:r>
+            <a:r>
+              <a:rPr lang="en-US" sz="1200" dirty="0">
+                <a:latin typeface="Arial" panose="020B0604020202020204" pitchFamily="34" charset="0"/>
+                <a:cs typeface="Arial" panose="020B0604020202020204" pitchFamily="34" charset="0"/>
+              </a:rPr>
+              <a:t> max grid scaling. </a:t>
+            </a:r>
+            <a:r>
+              <a:rPr lang="en-US" sz="1200" dirty="0" err="1">
+                <a:latin typeface="Arial" panose="020B0604020202020204" pitchFamily="34" charset="0"/>
+                <a:cs typeface="Arial" panose="020B0604020202020204" pitchFamily="34" charset="0"/>
+              </a:rPr>
+              <a:t>Ahora</a:t>
+            </a:r>
+            <a:r>
+              <a:rPr lang="en-US" sz="1200" dirty="0">
+                <a:latin typeface="Arial" panose="020B0604020202020204" pitchFamily="34" charset="0"/>
+                <a:cs typeface="Arial" panose="020B0604020202020204" pitchFamily="34" charset="0"/>
+              </a:rPr>
+              <a:t> se </a:t>
+            </a:r>
+            <a:r>
+              <a:rPr lang="en-US" sz="1200" dirty="0" err="1">
+                <a:latin typeface="Arial" panose="020B0604020202020204" pitchFamily="34" charset="0"/>
+                <a:cs typeface="Arial" panose="020B0604020202020204" pitchFamily="34" charset="0"/>
+              </a:rPr>
+              <a:t>obtiene</a:t>
+            </a:r>
+            <a:r>
+              <a:rPr lang="en-US" sz="1200" dirty="0">
+                <a:latin typeface="Arial" panose="020B0604020202020204" pitchFamily="34" charset="0"/>
+                <a:cs typeface="Arial" panose="020B0604020202020204" pitchFamily="34" charset="0"/>
+              </a:rPr>
+              <a:t> un valor </a:t>
+            </a:r>
+            <a:r>
+              <a:rPr lang="en-US" sz="1200" dirty="0" err="1">
+                <a:latin typeface="Arial" panose="020B0604020202020204" pitchFamily="34" charset="0"/>
+                <a:cs typeface="Arial" panose="020B0604020202020204" pitchFamily="34" charset="0"/>
+              </a:rPr>
+              <a:t>casi</a:t>
+            </a:r>
+            <a:r>
+              <a:rPr lang="en-US" sz="1200" dirty="0">
+                <a:latin typeface="Arial" panose="020B0604020202020204" pitchFamily="34" charset="0"/>
+                <a:cs typeface="Arial" panose="020B0604020202020204" pitchFamily="34" charset="0"/>
+              </a:rPr>
+              <a:t> </a:t>
+            </a:r>
+            <a:r>
+              <a:rPr lang="en-US" sz="1200" dirty="0" err="1">
+                <a:latin typeface="Arial" panose="020B0604020202020204" pitchFamily="34" charset="0"/>
+                <a:cs typeface="Arial" panose="020B0604020202020204" pitchFamily="34" charset="0"/>
+              </a:rPr>
+              <a:t>constante</a:t>
+            </a:r>
+            <a:r>
+              <a:rPr lang="en-US" sz="1200" dirty="0">
+                <a:latin typeface="Arial" panose="020B0604020202020204" pitchFamily="34" charset="0"/>
+                <a:cs typeface="Arial" panose="020B0604020202020204" pitchFamily="34" charset="0"/>
+              </a:rPr>
+              <a:t> a </a:t>
+            </a:r>
+            <a:r>
+              <a:rPr lang="en-US" sz="1200" dirty="0" err="1">
+                <a:latin typeface="Arial" panose="020B0604020202020204" pitchFamily="34" charset="0"/>
+                <a:cs typeface="Arial" panose="020B0604020202020204" pitchFamily="34" charset="0"/>
+              </a:rPr>
+              <a:t>partir</a:t>
+            </a:r>
+            <a:r>
+              <a:rPr lang="en-US" sz="1200" dirty="0">
+                <a:latin typeface="Arial" panose="020B0604020202020204" pitchFamily="34" charset="0"/>
+                <a:cs typeface="Arial" panose="020B0604020202020204" pitchFamily="34" charset="0"/>
+              </a:rPr>
+              <a:t> de 1.4. Para no </a:t>
+            </a:r>
+            <a:r>
+              <a:rPr lang="en-US" sz="1200" dirty="0" err="1">
+                <a:latin typeface="Arial" panose="020B0604020202020204" pitchFamily="34" charset="0"/>
+                <a:cs typeface="Arial" panose="020B0604020202020204" pitchFamily="34" charset="0"/>
+              </a:rPr>
+              <a:t>complicarnos</a:t>
+            </a:r>
+            <a:r>
+              <a:rPr lang="en-US" sz="1200" dirty="0">
+                <a:latin typeface="Arial" panose="020B0604020202020204" pitchFamily="34" charset="0"/>
+                <a:cs typeface="Arial" panose="020B0604020202020204" pitchFamily="34" charset="0"/>
+              </a:rPr>
+              <a:t> </a:t>
+            </a:r>
+            <a:r>
+              <a:rPr lang="en-US" sz="1200" dirty="0" err="1">
+                <a:latin typeface="Arial" panose="020B0604020202020204" pitchFamily="34" charset="0"/>
+                <a:cs typeface="Arial" panose="020B0604020202020204" pitchFamily="34" charset="0"/>
+              </a:rPr>
+              <a:t>mucho</a:t>
+            </a:r>
+            <a:r>
+              <a:rPr lang="en-US" sz="1200" dirty="0">
+                <a:latin typeface="Arial" panose="020B0604020202020204" pitchFamily="34" charset="0"/>
+                <a:cs typeface="Arial" panose="020B0604020202020204" pitchFamily="34" charset="0"/>
+              </a:rPr>
+              <a:t> </a:t>
+            </a:r>
+            <a:r>
+              <a:rPr lang="en-US" sz="1200" dirty="0" err="1">
+                <a:latin typeface="Arial" panose="020B0604020202020204" pitchFamily="34" charset="0"/>
+                <a:cs typeface="Arial" panose="020B0604020202020204" pitchFamily="34" charset="0"/>
+              </a:rPr>
+              <a:t>elegimos</a:t>
+            </a:r>
+            <a:r>
+              <a:rPr lang="en-US" sz="1200" dirty="0">
+                <a:latin typeface="Arial" panose="020B0604020202020204" pitchFamily="34" charset="0"/>
+                <a:cs typeface="Arial" panose="020B0604020202020204" pitchFamily="34" charset="0"/>
+              </a:rPr>
+              <a:t> </a:t>
+            </a:r>
+            <a:r>
+              <a:rPr lang="en-US" sz="1200" dirty="0" err="1">
+                <a:latin typeface="Arial" panose="020B0604020202020204" pitchFamily="34" charset="0"/>
+                <a:cs typeface="Arial" panose="020B0604020202020204" pitchFamily="34" charset="0"/>
+              </a:rPr>
+              <a:t>el</a:t>
+            </a:r>
+            <a:r>
+              <a:rPr lang="en-US" sz="1200" dirty="0">
+                <a:latin typeface="Arial" panose="020B0604020202020204" pitchFamily="34" charset="0"/>
+                <a:cs typeface="Arial" panose="020B0604020202020204" pitchFamily="34" charset="0"/>
+              </a:rPr>
+              <a:t> valor del medio, </a:t>
+            </a:r>
+            <a:r>
+              <a:rPr lang="en-US" sz="1200" dirty="0" err="1">
+                <a:latin typeface="Arial" panose="020B0604020202020204" pitchFamily="34" charset="0"/>
+                <a:cs typeface="Arial" panose="020B0604020202020204" pitchFamily="34" charset="0"/>
+              </a:rPr>
+              <a:t>en</a:t>
+            </a:r>
+            <a:r>
+              <a:rPr lang="en-US" sz="1200" dirty="0">
+                <a:latin typeface="Arial" panose="020B0604020202020204" pitchFamily="34" charset="0"/>
+                <a:cs typeface="Arial" panose="020B0604020202020204" pitchFamily="34" charset="0"/>
+              </a:rPr>
+              <a:t> </a:t>
+            </a:r>
+            <a:r>
+              <a:rPr lang="en-US" sz="1200" dirty="0" err="1">
+                <a:latin typeface="Arial" panose="020B0604020202020204" pitchFamily="34" charset="0"/>
+                <a:cs typeface="Arial" panose="020B0604020202020204" pitchFamily="34" charset="0"/>
+              </a:rPr>
+              <a:t>este</a:t>
+            </a:r>
+            <a:r>
+              <a:rPr lang="en-US" sz="1200" dirty="0">
+                <a:latin typeface="Arial" panose="020B0604020202020204" pitchFamily="34" charset="0"/>
+                <a:cs typeface="Arial" panose="020B0604020202020204" pitchFamily="34" charset="0"/>
+              </a:rPr>
+              <a:t> </a:t>
+            </a:r>
+            <a:r>
+              <a:rPr lang="en-US" sz="1200" dirty="0" err="1">
+                <a:latin typeface="Arial" panose="020B0604020202020204" pitchFamily="34" charset="0"/>
+                <a:cs typeface="Arial" panose="020B0604020202020204" pitchFamily="34" charset="0"/>
+              </a:rPr>
+              <a:t>caso</a:t>
+            </a:r>
+            <a:r>
+              <a:rPr lang="en-US" sz="1200" dirty="0">
+                <a:latin typeface="Arial" panose="020B0604020202020204" pitchFamily="34" charset="0"/>
+                <a:cs typeface="Arial" panose="020B0604020202020204" pitchFamily="34" charset="0"/>
+              </a:rPr>
+              <a:t> 1.5.</a:t>
+            </a:r>
           </a:p>
           <a:p>
             <a:pPr algn="just"/>
@@ -5146,24 +5449,69 @@
           </a:p>
           <a:p>
             <a:pPr algn="just"/>
-            <a:endParaRPr lang="en-US" sz="1200" dirty="0">
-              <a:latin typeface="Arial" panose="020B0604020202020204" pitchFamily="34" charset="0"/>
-              <a:cs typeface="Arial" panose="020B0604020202020204" pitchFamily="34" charset="0"/>
-            </a:endParaRPr>
-          </a:p>
-          <a:p>
-            <a:pPr algn="just"/>
-            <a:endParaRPr lang="en-US" sz="1200" dirty="0">
-              <a:latin typeface="Arial" panose="020B0604020202020204" pitchFamily="34" charset="0"/>
-              <a:cs typeface="Arial" panose="020B0604020202020204" pitchFamily="34" charset="0"/>
-            </a:endParaRPr>
-          </a:p>
-          <a:p>
-            <a:pPr algn="just"/>
-            <a:endParaRPr lang="en-US" sz="1200" dirty="0">
-              <a:latin typeface="Arial" panose="020B0604020202020204" pitchFamily="34" charset="0"/>
-              <a:cs typeface="Arial" panose="020B0604020202020204" pitchFamily="34" charset="0"/>
-            </a:endParaRPr>
+            <a:r>
+              <a:rPr lang="en-US" sz="1200" dirty="0">
+                <a:latin typeface="Arial" panose="020B0604020202020204" pitchFamily="34" charset="0"/>
+                <a:cs typeface="Arial" panose="020B0604020202020204" pitchFamily="34" charset="0"/>
+              </a:rPr>
+              <a:t>Por tanto </a:t>
+            </a:r>
+            <a:r>
+              <a:rPr lang="en-US" sz="1200" dirty="0" err="1">
+                <a:latin typeface="Arial" panose="020B0604020202020204" pitchFamily="34" charset="0"/>
+                <a:cs typeface="Arial" panose="020B0604020202020204" pitchFamily="34" charset="0"/>
+              </a:rPr>
+              <a:t>concluimos</a:t>
+            </a:r>
+            <a:r>
+              <a:rPr lang="en-US" sz="1200" dirty="0">
+                <a:latin typeface="Arial" panose="020B0604020202020204" pitchFamily="34" charset="0"/>
+                <a:cs typeface="Arial" panose="020B0604020202020204" pitchFamily="34" charset="0"/>
+              </a:rPr>
+              <a:t> con los </a:t>
+            </a:r>
+            <a:r>
+              <a:rPr lang="en-US" sz="1200" dirty="0" err="1">
+                <a:latin typeface="Arial" panose="020B0604020202020204" pitchFamily="34" charset="0"/>
+                <a:cs typeface="Arial" panose="020B0604020202020204" pitchFamily="34" charset="0"/>
+              </a:rPr>
+              <a:t>valores</a:t>
+            </a:r>
+            <a:r>
+              <a:rPr lang="en-US" sz="1200" dirty="0">
+                <a:latin typeface="Arial" panose="020B0604020202020204" pitchFamily="34" charset="0"/>
+                <a:cs typeface="Arial" panose="020B0604020202020204" pitchFamily="34" charset="0"/>
+              </a:rPr>
+              <a:t> </a:t>
+            </a:r>
+            <a:r>
+              <a:rPr lang="en-US" sz="1200" dirty="0" err="1">
+                <a:latin typeface="Arial" panose="020B0604020202020204" pitchFamily="34" charset="0"/>
+                <a:cs typeface="Arial" panose="020B0604020202020204" pitchFamily="34" charset="0"/>
+              </a:rPr>
+              <a:t>ideales</a:t>
+            </a:r>
+            <a:r>
+              <a:rPr lang="en-US" sz="1200" dirty="0">
+                <a:latin typeface="Arial" panose="020B0604020202020204" pitchFamily="34" charset="0"/>
+                <a:cs typeface="Arial" panose="020B0604020202020204" pitchFamily="34" charset="0"/>
+              </a:rPr>
+              <a:t> de </a:t>
+            </a:r>
+            <a:r>
+              <a:rPr lang="en-US" sz="1200" dirty="0" err="1">
+                <a:latin typeface="Arial" panose="020B0604020202020204" pitchFamily="34" charset="0"/>
+                <a:cs typeface="Arial" panose="020B0604020202020204" pitchFamily="34" charset="0"/>
+              </a:rPr>
+              <a:t>resolución</a:t>
+            </a:r>
+            <a:r>
+              <a:rPr lang="en-US" sz="1200" dirty="0">
+                <a:latin typeface="Arial" panose="020B0604020202020204" pitchFamily="34" charset="0"/>
+                <a:cs typeface="Arial" panose="020B0604020202020204" pitchFamily="34" charset="0"/>
+              </a:rPr>
+              <a:t> 20 y de max grid 1.5.</a:t>
+            </a:r>
           </a:p>
         </p:txBody>
       </p:sp>
@@ -5219,65 +5567,66 @@
           </a:p>
         </p:txBody>
       </p:sp>
-      <p:sp>
-        <p:nvSpPr>
-          <p:cNvPr id="4" name="CuadroTexto 3">
+      <p:pic>
+        <p:nvPicPr>
+          <p:cNvPr id="7" name="Imagen 6">
             <a:extLst>
               <a:ext uri="{FF2B5EF4-FFF2-40B4-BE49-F238E27FC236}">
-                <a16:creationId xmlns:a16="http://schemas.microsoft.com/office/drawing/2014/main" id="{C2C94B57-6111-4070-F6BA-8C3B9C305618}"/>
+                <a16:creationId xmlns:a16="http://schemas.microsoft.com/office/drawing/2014/main" id="{5E1BD20E-1902-40FE-ADCB-CC78EC696F0B}"/>
               </a:ext>
             </a:extLst>
           </p:cNvPr>
-          <p:cNvSpPr txBox="1"/>
+          <p:cNvPicPr>
+            <a:picLocks noChangeAspect="1"/>
+          </p:cNvPicPr>
           <p:nvPr/>
-        </p:nvSpPr>
+        </p:nvPicPr>
+        <p:blipFill>
+          <a:blip r:embed="rId5"/>
+          <a:stretch>
+            <a:fillRect/>
+          </a:stretch>
+        </p:blipFill>
         <p:spPr>
           <a:xfrm>
-            <a:off x="6792815" y="2698951"/>
-            <a:ext cx="4546634" cy="923330"/>
+            <a:off x="1407303" y="1618138"/>
+            <a:ext cx="3890834" cy="3026204"/>
           </a:xfrm>
           <a:prstGeom prst="rect">
             <a:avLst/>
           </a:prstGeom>
-          <a:noFill/>
         </p:spPr>
-        <p:txBody>
-          <a:bodyPr wrap="square" rtlCol="0">
-            <a:spAutoFit/>
-          </a:bodyPr>
-          <a:lstStyle/>
-          <a:p>
-            <a:pPr algn="ctr"/>
-            <a:r>
-              <a:rPr lang="en-US" b="1" dirty="0"/>
-              <a:t>deep</a:t>
-            </a:r>
-            <a:r>
-              <a:rPr lang="en-US" dirty="0"/>
-              <a:t> waveguide</a:t>
-            </a:r>
-          </a:p>
-          <a:p>
-            <a:pPr algn="ctr"/>
-            <a:endParaRPr lang="en-US" dirty="0"/>
-          </a:p>
-          <a:p>
-            <a:pPr algn="ctr"/>
-            <a:r>
-              <a:rPr lang="en-US" dirty="0"/>
-              <a:t>Paste neff_TE0 vs </a:t>
-            </a:r>
-            <a:r>
-              <a:rPr lang="en-US" dirty="0" err="1"/>
-              <a:t>max_grid_scaling</a:t>
-            </a:r>
-            <a:r>
-              <a:rPr lang="en-US" dirty="0"/>
-              <a:t> plot here</a:t>
-            </a:r>
-          </a:p>
-        </p:txBody>
-      </p:sp>
+      </p:pic>
+      <p:pic>
+        <p:nvPicPr>
+          <p:cNvPr id="11" name="Imagen 10">
+            <a:extLst>
+              <a:ext uri="{FF2B5EF4-FFF2-40B4-BE49-F238E27FC236}">
+                <a16:creationId xmlns:a16="http://schemas.microsoft.com/office/drawing/2014/main" id="{130C802A-92C9-416C-8A7C-BD12FB968F1D}"/>
+              </a:ext>
+            </a:extLst>
+          </p:cNvPr>
+          <p:cNvPicPr>
+            <a:picLocks noChangeAspect="1"/>
+          </p:cNvPicPr>
+          <p:nvPr/>
+        </p:nvPicPr>
+        <p:blipFill>
+          <a:blip r:embed="rId6"/>
+          <a:stretch>
+            <a:fillRect/>
+          </a:stretch>
+        </p:blipFill>
+        <p:spPr>
+          <a:xfrm>
+            <a:off x="7160076" y="1573793"/>
+            <a:ext cx="4059631" cy="3114894"/>
+          </a:xfrm>
+          <a:prstGeom prst="rect">
+            <a:avLst/>
+          </a:prstGeom>
+        </p:spPr>
+      </p:pic>
     </p:spTree>
     <p:extLst>
       <p:ext uri="{BB962C8B-B14F-4D97-AF65-F5344CB8AC3E}">
@@ -5487,7 +5836,7 @@
         <p:spPr>
           <a:xfrm>
             <a:off x="609441" y="4860334"/>
-            <a:ext cx="11199971" cy="1200329"/>
+            <a:ext cx="11199971" cy="1384995"/>
           </a:xfrm>
           <a:prstGeom prst="rect">
             <a:avLst/>
@@ -5515,21 +5864,353 @@
                 <a:latin typeface="Arial" panose="020B0604020202020204" pitchFamily="34" charset="0"/>
                 <a:cs typeface="Arial" panose="020B0604020202020204" pitchFamily="34" charset="0"/>
               </a:rPr>
-              <a:t>Comment results (neff changes this way with width, polarization behavior, </a:t>
-            </a:r>
-            <a:r>
-              <a:rPr lang="en-US" sz="1200" dirty="0" err="1">
-                <a:latin typeface="Arial" panose="020B0604020202020204" pitchFamily="34" charset="0"/>
-                <a:cs typeface="Arial" panose="020B0604020202020204" pitchFamily="34" charset="0"/>
-              </a:rPr>
-              <a:t>etc</a:t>
-            </a:r>
-            <a:r>
-              <a:rPr lang="en-US" sz="1200" dirty="0">
-                <a:latin typeface="Arial" panose="020B0604020202020204" pitchFamily="34" charset="0"/>
-                <a:cs typeface="Arial" panose="020B0604020202020204" pitchFamily="34" charset="0"/>
-              </a:rPr>
-              <a:t>…)</a:t>
+              <a:t>Para </a:t>
+            </a:r>
+            <a:r>
+              <a:rPr lang="en-US" sz="1200" dirty="0" err="1">
+                <a:latin typeface="Arial" panose="020B0604020202020204" pitchFamily="34" charset="0"/>
+                <a:cs typeface="Arial" panose="020B0604020202020204" pitchFamily="34" charset="0"/>
+              </a:rPr>
+              <a:t>estos</a:t>
+            </a:r>
+            <a:r>
+              <a:rPr lang="en-US" sz="1200" dirty="0">
+                <a:latin typeface="Arial" panose="020B0604020202020204" pitchFamily="34" charset="0"/>
+                <a:cs typeface="Arial" panose="020B0604020202020204" pitchFamily="34" charset="0"/>
+              </a:rPr>
+              <a:t> </a:t>
+            </a:r>
+            <a:r>
+              <a:rPr lang="en-US" sz="1200" dirty="0" err="1">
+                <a:latin typeface="Arial" panose="020B0604020202020204" pitchFamily="34" charset="0"/>
+                <a:cs typeface="Arial" panose="020B0604020202020204" pitchFamily="34" charset="0"/>
+              </a:rPr>
+              <a:t>valores</a:t>
+            </a:r>
+            <a:r>
+              <a:rPr lang="en-US" sz="1200" dirty="0">
+                <a:latin typeface="Arial" panose="020B0604020202020204" pitchFamily="34" charset="0"/>
+                <a:cs typeface="Arial" panose="020B0604020202020204" pitchFamily="34" charset="0"/>
+              </a:rPr>
+              <a:t> de cross-section </a:t>
+            </a:r>
+            <a:r>
+              <a:rPr lang="en-US" sz="1200" dirty="0" err="1">
+                <a:latin typeface="Arial" panose="020B0604020202020204" pitchFamily="34" charset="0"/>
+                <a:cs typeface="Arial" panose="020B0604020202020204" pitchFamily="34" charset="0"/>
+              </a:rPr>
+              <a:t>más</a:t>
+            </a:r>
+            <a:r>
+              <a:rPr lang="en-US" sz="1200" dirty="0">
+                <a:latin typeface="Arial" panose="020B0604020202020204" pitchFamily="34" charset="0"/>
+                <a:cs typeface="Arial" panose="020B0604020202020204" pitchFamily="34" charset="0"/>
+              </a:rPr>
+              <a:t> los </a:t>
+            </a:r>
+            <a:r>
+              <a:rPr lang="en-US" sz="1200" dirty="0" err="1">
+                <a:latin typeface="Arial" panose="020B0604020202020204" pitchFamily="34" charset="0"/>
+                <a:cs typeface="Arial" panose="020B0604020202020204" pitchFamily="34" charset="0"/>
+              </a:rPr>
+              <a:t>valores</a:t>
+            </a:r>
+            <a:r>
+              <a:rPr lang="en-US" sz="1200" dirty="0">
+                <a:latin typeface="Arial" panose="020B0604020202020204" pitchFamily="34" charset="0"/>
+                <a:cs typeface="Arial" panose="020B0604020202020204" pitchFamily="34" charset="0"/>
+              </a:rPr>
+              <a:t> </a:t>
+            </a:r>
+            <a:r>
+              <a:rPr lang="en-US" sz="1200" dirty="0" err="1">
+                <a:latin typeface="Arial" panose="020B0604020202020204" pitchFamily="34" charset="0"/>
+                <a:cs typeface="Arial" panose="020B0604020202020204" pitchFamily="34" charset="0"/>
+              </a:rPr>
+              <a:t>óptmos</a:t>
+            </a:r>
+            <a:r>
+              <a:rPr lang="en-US" sz="1200" dirty="0">
+                <a:latin typeface="Arial" panose="020B0604020202020204" pitchFamily="34" charset="0"/>
+                <a:cs typeface="Arial" panose="020B0604020202020204" pitchFamily="34" charset="0"/>
+              </a:rPr>
+              <a:t> </a:t>
+            </a:r>
+            <a:r>
+              <a:rPr lang="en-US" sz="1200" dirty="0" err="1">
+                <a:latin typeface="Arial" panose="020B0604020202020204" pitchFamily="34" charset="0"/>
+                <a:cs typeface="Arial" panose="020B0604020202020204" pitchFamily="34" charset="0"/>
+              </a:rPr>
+              <a:t>calculados</a:t>
+            </a:r>
+            <a:r>
+              <a:rPr lang="en-US" sz="1200" dirty="0">
+                <a:latin typeface="Arial" panose="020B0604020202020204" pitchFamily="34" charset="0"/>
+                <a:cs typeface="Arial" panose="020B0604020202020204" pitchFamily="34" charset="0"/>
+              </a:rPr>
+              <a:t> </a:t>
+            </a:r>
+            <a:r>
+              <a:rPr lang="en-US" sz="1200" dirty="0" err="1">
+                <a:latin typeface="Arial" panose="020B0604020202020204" pitchFamily="34" charset="0"/>
+                <a:cs typeface="Arial" panose="020B0604020202020204" pitchFamily="34" charset="0"/>
+              </a:rPr>
+              <a:t>anteriormente</a:t>
+            </a:r>
+            <a:r>
+              <a:rPr lang="en-US" sz="1200" dirty="0">
+                <a:latin typeface="Arial" panose="020B0604020202020204" pitchFamily="34" charset="0"/>
+                <a:cs typeface="Arial" panose="020B0604020202020204" pitchFamily="34" charset="0"/>
+              </a:rPr>
+              <a:t> se </a:t>
+            </a:r>
+            <a:r>
+              <a:rPr lang="en-US" sz="1200" dirty="0" err="1">
+                <a:latin typeface="Arial" panose="020B0604020202020204" pitchFamily="34" charset="0"/>
+                <a:cs typeface="Arial" panose="020B0604020202020204" pitchFamily="34" charset="0"/>
+              </a:rPr>
+              <a:t>obtiene</a:t>
+            </a:r>
+            <a:r>
+              <a:rPr lang="en-US" sz="1200" dirty="0">
+                <a:latin typeface="Arial" panose="020B0604020202020204" pitchFamily="34" charset="0"/>
+                <a:cs typeface="Arial" panose="020B0604020202020204" pitchFamily="34" charset="0"/>
+              </a:rPr>
+              <a:t> la </a:t>
+            </a:r>
+            <a:r>
+              <a:rPr lang="en-US" sz="1200" dirty="0" err="1">
+                <a:latin typeface="Arial" panose="020B0604020202020204" pitchFamily="34" charset="0"/>
+                <a:cs typeface="Arial" panose="020B0604020202020204" pitchFamily="34" charset="0"/>
+              </a:rPr>
+              <a:t>siguiente</a:t>
+            </a:r>
+            <a:r>
+              <a:rPr lang="en-US" sz="1200" dirty="0">
+                <a:latin typeface="Arial" panose="020B0604020202020204" pitchFamily="34" charset="0"/>
+                <a:cs typeface="Arial" panose="020B0604020202020204" pitchFamily="34" charset="0"/>
+              </a:rPr>
+              <a:t> </a:t>
+            </a:r>
+            <a:r>
+              <a:rPr lang="en-US" sz="1200" dirty="0" err="1">
+                <a:latin typeface="Arial" panose="020B0604020202020204" pitchFamily="34" charset="0"/>
+                <a:cs typeface="Arial" panose="020B0604020202020204" pitchFamily="34" charset="0"/>
+              </a:rPr>
+              <a:t>gráfica</a:t>
+            </a:r>
+            <a:r>
+              <a:rPr lang="en-US" sz="1200" dirty="0">
+                <a:latin typeface="Arial" panose="020B0604020202020204" pitchFamily="34" charset="0"/>
+                <a:cs typeface="Arial" panose="020B0604020202020204" pitchFamily="34" charset="0"/>
+              </a:rPr>
+              <a:t> de </a:t>
+            </a:r>
+            <a:r>
+              <a:rPr lang="en-US" sz="1200" dirty="0" err="1">
+                <a:latin typeface="Arial" panose="020B0604020202020204" pitchFamily="34" charset="0"/>
+                <a:cs typeface="Arial" panose="020B0604020202020204" pitchFamily="34" charset="0"/>
+              </a:rPr>
+              <a:t>dependencia</a:t>
+            </a:r>
+            <a:r>
+              <a:rPr lang="en-US" sz="1200" dirty="0">
+                <a:latin typeface="Arial" panose="020B0604020202020204" pitchFamily="34" charset="0"/>
+                <a:cs typeface="Arial" panose="020B0604020202020204" pitchFamily="34" charset="0"/>
+              </a:rPr>
+              <a:t> entre </a:t>
+            </a:r>
+            <a:r>
+              <a:rPr lang="en-US" sz="1200" dirty="0" err="1">
+                <a:latin typeface="Arial" panose="020B0604020202020204" pitchFamily="34" charset="0"/>
+                <a:cs typeface="Arial" panose="020B0604020202020204" pitchFamily="34" charset="0"/>
+              </a:rPr>
+              <a:t>el</a:t>
+            </a:r>
+            <a:r>
+              <a:rPr lang="en-US" sz="1200" dirty="0">
+                <a:latin typeface="Arial" panose="020B0604020202020204" pitchFamily="34" charset="0"/>
+                <a:cs typeface="Arial" panose="020B0604020202020204" pitchFamily="34" charset="0"/>
+              </a:rPr>
+              <a:t> </a:t>
+            </a:r>
+            <a:r>
+              <a:rPr lang="en-US" sz="1200" dirty="0" err="1">
+                <a:latin typeface="Arial" panose="020B0604020202020204" pitchFamily="34" charset="0"/>
+                <a:cs typeface="Arial" panose="020B0604020202020204" pitchFamily="34" charset="0"/>
+              </a:rPr>
+              <a:t>n_eff</a:t>
+            </a:r>
+            <a:r>
+              <a:rPr lang="en-US" sz="1200" dirty="0">
+                <a:latin typeface="Arial" panose="020B0604020202020204" pitchFamily="34" charset="0"/>
+                <a:cs typeface="Arial" panose="020B0604020202020204" pitchFamily="34" charset="0"/>
+              </a:rPr>
+              <a:t> y </a:t>
+            </a:r>
+            <a:r>
+              <a:rPr lang="en-US" sz="1200" dirty="0" err="1">
+                <a:latin typeface="Arial" panose="020B0604020202020204" pitchFamily="34" charset="0"/>
+                <a:cs typeface="Arial" panose="020B0604020202020204" pitchFamily="34" charset="0"/>
+              </a:rPr>
+              <a:t>el</a:t>
+            </a:r>
+            <a:r>
+              <a:rPr lang="en-US" sz="1200" dirty="0">
+                <a:latin typeface="Arial" panose="020B0604020202020204" pitchFamily="34" charset="0"/>
+                <a:cs typeface="Arial" panose="020B0604020202020204" pitchFamily="34" charset="0"/>
+              </a:rPr>
+              <a:t> width.</a:t>
+            </a:r>
+          </a:p>
+          <a:p>
+            <a:pPr algn="just"/>
+            <a:r>
+              <a:rPr lang="en-US" sz="1200" dirty="0">
+                <a:latin typeface="Arial" panose="020B0604020202020204" pitchFamily="34" charset="0"/>
+                <a:cs typeface="Arial" panose="020B0604020202020204" pitchFamily="34" charset="0"/>
+              </a:rPr>
+              <a:t>Los dos </a:t>
+            </a:r>
+            <a:r>
+              <a:rPr lang="en-US" sz="1200" dirty="0" err="1">
+                <a:latin typeface="Arial" panose="020B0604020202020204" pitchFamily="34" charset="0"/>
+                <a:cs typeface="Arial" panose="020B0604020202020204" pitchFamily="34" charset="0"/>
+              </a:rPr>
+              <a:t>primeros</a:t>
+            </a:r>
+            <a:r>
+              <a:rPr lang="en-US" sz="1200" dirty="0">
+                <a:latin typeface="Arial" panose="020B0604020202020204" pitchFamily="34" charset="0"/>
+                <a:cs typeface="Arial" panose="020B0604020202020204" pitchFamily="34" charset="0"/>
+              </a:rPr>
+              <a:t> </a:t>
+            </a:r>
+            <a:r>
+              <a:rPr lang="en-US" sz="1200" dirty="0" err="1">
+                <a:latin typeface="Arial" panose="020B0604020202020204" pitchFamily="34" charset="0"/>
+                <a:cs typeface="Arial" panose="020B0604020202020204" pitchFamily="34" charset="0"/>
+              </a:rPr>
+              <a:t>modos</a:t>
+            </a:r>
+            <a:r>
+              <a:rPr lang="en-US" sz="1200" dirty="0">
+                <a:latin typeface="Arial" panose="020B0604020202020204" pitchFamily="34" charset="0"/>
+                <a:cs typeface="Arial" panose="020B0604020202020204" pitchFamily="34" charset="0"/>
+              </a:rPr>
+              <a:t> se </a:t>
+            </a:r>
+            <a:r>
+              <a:rPr lang="en-US" sz="1200" dirty="0" err="1">
+                <a:latin typeface="Arial" panose="020B0604020202020204" pitchFamily="34" charset="0"/>
+                <a:cs typeface="Arial" panose="020B0604020202020204" pitchFamily="34" charset="0"/>
+              </a:rPr>
+              <a:t>propagan</a:t>
+            </a:r>
+            <a:r>
+              <a:rPr lang="en-US" sz="1200" dirty="0">
+                <a:latin typeface="Arial" panose="020B0604020202020204" pitchFamily="34" charset="0"/>
+                <a:cs typeface="Arial" panose="020B0604020202020204" pitchFamily="34" charset="0"/>
+              </a:rPr>
+              <a:t> </a:t>
+            </a:r>
+            <a:r>
+              <a:rPr lang="en-US" sz="1200" dirty="0" err="1">
+                <a:latin typeface="Arial" panose="020B0604020202020204" pitchFamily="34" charset="0"/>
+                <a:cs typeface="Arial" panose="020B0604020202020204" pitchFamily="34" charset="0"/>
+              </a:rPr>
+              <a:t>independientemente</a:t>
+            </a:r>
+            <a:r>
+              <a:rPr lang="en-US" sz="1200" dirty="0">
+                <a:latin typeface="Arial" panose="020B0604020202020204" pitchFamily="34" charset="0"/>
+                <a:cs typeface="Arial" panose="020B0604020202020204" pitchFamily="34" charset="0"/>
+              </a:rPr>
+              <a:t> del valor del width. Sin embargo, los </a:t>
+            </a:r>
+            <a:r>
+              <a:rPr lang="en-US" sz="1200" dirty="0" err="1">
+                <a:latin typeface="Arial" panose="020B0604020202020204" pitchFamily="34" charset="0"/>
+                <a:cs typeface="Arial" panose="020B0604020202020204" pitchFamily="34" charset="0"/>
+              </a:rPr>
+              <a:t>otros</a:t>
+            </a:r>
+            <a:r>
+              <a:rPr lang="en-US" sz="1200" dirty="0">
+                <a:latin typeface="Arial" panose="020B0604020202020204" pitchFamily="34" charset="0"/>
+                <a:cs typeface="Arial" panose="020B0604020202020204" pitchFamily="34" charset="0"/>
+              </a:rPr>
+              <a:t> dos </a:t>
+            </a:r>
+            <a:r>
+              <a:rPr lang="en-US" sz="1200" dirty="0" err="1">
+                <a:latin typeface="Arial" panose="020B0604020202020204" pitchFamily="34" charset="0"/>
+                <a:cs typeface="Arial" panose="020B0604020202020204" pitchFamily="34" charset="0"/>
+              </a:rPr>
+              <a:t>modos</a:t>
+            </a:r>
+            <a:r>
+              <a:rPr lang="en-US" sz="1200" dirty="0">
+                <a:latin typeface="Arial" panose="020B0604020202020204" pitchFamily="34" charset="0"/>
+                <a:cs typeface="Arial" panose="020B0604020202020204" pitchFamily="34" charset="0"/>
+              </a:rPr>
+              <a:t> se </a:t>
+            </a:r>
+            <a:r>
+              <a:rPr lang="en-US" sz="1200" dirty="0" err="1">
+                <a:latin typeface="Arial" panose="020B0604020202020204" pitchFamily="34" charset="0"/>
+                <a:cs typeface="Arial" panose="020B0604020202020204" pitchFamily="34" charset="0"/>
+              </a:rPr>
+              <a:t>propagan</a:t>
+            </a:r>
+            <a:r>
+              <a:rPr lang="en-US" sz="1200" dirty="0">
+                <a:latin typeface="Arial" panose="020B0604020202020204" pitchFamily="34" charset="0"/>
+                <a:cs typeface="Arial" panose="020B0604020202020204" pitchFamily="34" charset="0"/>
+              </a:rPr>
+              <a:t> solo a </a:t>
+            </a:r>
+            <a:r>
+              <a:rPr lang="en-US" sz="1200" dirty="0" err="1">
+                <a:latin typeface="Arial" panose="020B0604020202020204" pitchFamily="34" charset="0"/>
+                <a:cs typeface="Arial" panose="020B0604020202020204" pitchFamily="34" charset="0"/>
+              </a:rPr>
+              <a:t>partir</a:t>
+            </a:r>
+            <a:r>
+              <a:rPr lang="en-US" sz="1200" dirty="0">
+                <a:latin typeface="Arial" panose="020B0604020202020204" pitchFamily="34" charset="0"/>
+                <a:cs typeface="Arial" panose="020B0604020202020204" pitchFamily="34" charset="0"/>
+              </a:rPr>
+              <a:t> de </a:t>
+            </a:r>
+            <a:r>
+              <a:rPr lang="en-US" sz="1200" dirty="0" err="1">
+                <a:latin typeface="Arial" panose="020B0604020202020204" pitchFamily="34" charset="0"/>
+                <a:cs typeface="Arial" panose="020B0604020202020204" pitchFamily="34" charset="0"/>
+              </a:rPr>
+              <a:t>ciertos</a:t>
+            </a:r>
+            <a:r>
+              <a:rPr lang="en-US" sz="1200" dirty="0">
+                <a:latin typeface="Arial" panose="020B0604020202020204" pitchFamily="34" charset="0"/>
+                <a:cs typeface="Arial" panose="020B0604020202020204" pitchFamily="34" charset="0"/>
+              </a:rPr>
+              <a:t> </a:t>
+            </a:r>
+            <a:r>
+              <a:rPr lang="en-US" sz="1200" dirty="0" err="1">
+                <a:latin typeface="Arial" panose="020B0604020202020204" pitchFamily="34" charset="0"/>
+                <a:cs typeface="Arial" panose="020B0604020202020204" pitchFamily="34" charset="0"/>
+              </a:rPr>
+              <a:t>valores</a:t>
+            </a:r>
+            <a:r>
+              <a:rPr lang="en-US" sz="1200" dirty="0">
+                <a:latin typeface="Arial" panose="020B0604020202020204" pitchFamily="34" charset="0"/>
+                <a:cs typeface="Arial" panose="020B0604020202020204" pitchFamily="34" charset="0"/>
+              </a:rPr>
+              <a:t>.</a:t>
             </a:r>
           </a:p>
           <a:p>
@@ -5541,10 +6222,153 @@
           </a:p>
           <a:p>
             <a:pPr algn="just"/>
-            <a:endParaRPr lang="en-US" sz="1200" dirty="0">
-              <a:latin typeface="Arial" panose="020B0604020202020204" pitchFamily="34" charset="0"/>
-              <a:cs typeface="Arial" panose="020B0604020202020204" pitchFamily="34" charset="0"/>
-            </a:endParaRPr>
+            <a:r>
+              <a:rPr lang="en-US" sz="1200" dirty="0">
+                <a:latin typeface="Arial" panose="020B0604020202020204" pitchFamily="34" charset="0"/>
+                <a:cs typeface="Arial" panose="020B0604020202020204" pitchFamily="34" charset="0"/>
+              </a:rPr>
+              <a:t>El mode 2 se </a:t>
+            </a:r>
+            <a:r>
+              <a:rPr lang="en-US" sz="1200" dirty="0" err="1">
+                <a:latin typeface="Arial" panose="020B0604020202020204" pitchFamily="34" charset="0"/>
+                <a:cs typeface="Arial" panose="020B0604020202020204" pitchFamily="34" charset="0"/>
+              </a:rPr>
+              <a:t>propagará</a:t>
+            </a:r>
+            <a:r>
+              <a:rPr lang="en-US" sz="1200" dirty="0">
+                <a:latin typeface="Arial" panose="020B0604020202020204" pitchFamily="34" charset="0"/>
+                <a:cs typeface="Arial" panose="020B0604020202020204" pitchFamily="34" charset="0"/>
+              </a:rPr>
+              <a:t> </a:t>
+            </a:r>
+            <a:r>
+              <a:rPr lang="en-US" sz="1200" dirty="0" err="1">
+                <a:latin typeface="Arial" panose="020B0604020202020204" pitchFamily="34" charset="0"/>
+                <a:cs typeface="Arial" panose="020B0604020202020204" pitchFamily="34" charset="0"/>
+              </a:rPr>
+              <a:t>cuando</a:t>
+            </a:r>
+            <a:r>
+              <a:rPr lang="en-US" sz="1200" dirty="0">
+                <a:latin typeface="Arial" panose="020B0604020202020204" pitchFamily="34" charset="0"/>
+                <a:cs typeface="Arial" panose="020B0604020202020204" pitchFamily="34" charset="0"/>
+              </a:rPr>
+              <a:t> </a:t>
+            </a:r>
+            <a:r>
+              <a:rPr lang="en-US" sz="1200" dirty="0" err="1">
+                <a:latin typeface="Arial" panose="020B0604020202020204" pitchFamily="34" charset="0"/>
+                <a:cs typeface="Arial" panose="020B0604020202020204" pitchFamily="34" charset="0"/>
+              </a:rPr>
+              <a:t>el</a:t>
+            </a:r>
+            <a:r>
+              <a:rPr lang="en-US" sz="1200" dirty="0">
+                <a:latin typeface="Arial" panose="020B0604020202020204" pitchFamily="34" charset="0"/>
+                <a:cs typeface="Arial" panose="020B0604020202020204" pitchFamily="34" charset="0"/>
+              </a:rPr>
+              <a:t> width </a:t>
+            </a:r>
+            <a:r>
+              <a:rPr lang="en-US" sz="1200" dirty="0" err="1">
+                <a:latin typeface="Arial" panose="020B0604020202020204" pitchFamily="34" charset="0"/>
+                <a:cs typeface="Arial" panose="020B0604020202020204" pitchFamily="34" charset="0"/>
+              </a:rPr>
+              <a:t>supere</a:t>
+            </a:r>
+            <a:r>
+              <a:rPr lang="en-US" sz="1200" dirty="0">
+                <a:latin typeface="Arial" panose="020B0604020202020204" pitchFamily="34" charset="0"/>
+                <a:cs typeface="Arial" panose="020B0604020202020204" pitchFamily="34" charset="0"/>
+              </a:rPr>
+              <a:t> los 1.25 um y </a:t>
+            </a:r>
+            <a:r>
+              <a:rPr lang="en-US" sz="1200" dirty="0" err="1">
+                <a:latin typeface="Arial" panose="020B0604020202020204" pitchFamily="34" charset="0"/>
+                <a:cs typeface="Arial" panose="020B0604020202020204" pitchFamily="34" charset="0"/>
+              </a:rPr>
+              <a:t>el</a:t>
+            </a:r>
+            <a:r>
+              <a:rPr lang="en-US" sz="1200" dirty="0">
+                <a:latin typeface="Arial" panose="020B0604020202020204" pitchFamily="34" charset="0"/>
+                <a:cs typeface="Arial" panose="020B0604020202020204" pitchFamily="34" charset="0"/>
+              </a:rPr>
+              <a:t> modo 3 </a:t>
+            </a:r>
+            <a:r>
+              <a:rPr lang="en-US" sz="1200" dirty="0" err="1">
+                <a:latin typeface="Arial" panose="020B0604020202020204" pitchFamily="34" charset="0"/>
+                <a:cs typeface="Arial" panose="020B0604020202020204" pitchFamily="34" charset="0"/>
+              </a:rPr>
+              <a:t>hará</a:t>
+            </a:r>
+            <a:r>
+              <a:rPr lang="en-US" sz="1200" dirty="0">
+                <a:latin typeface="Arial" panose="020B0604020202020204" pitchFamily="34" charset="0"/>
+                <a:cs typeface="Arial" panose="020B0604020202020204" pitchFamily="34" charset="0"/>
+              </a:rPr>
+              <a:t> lo </a:t>
+            </a:r>
+            <a:r>
+              <a:rPr lang="en-US" sz="1200" dirty="0" err="1">
+                <a:latin typeface="Arial" panose="020B0604020202020204" pitchFamily="34" charset="0"/>
+                <a:cs typeface="Arial" panose="020B0604020202020204" pitchFamily="34" charset="0"/>
+              </a:rPr>
+              <a:t>mismo</a:t>
+            </a:r>
+            <a:r>
+              <a:rPr lang="en-US" sz="1200" dirty="0">
+                <a:latin typeface="Arial" panose="020B0604020202020204" pitchFamily="34" charset="0"/>
+                <a:cs typeface="Arial" panose="020B0604020202020204" pitchFamily="34" charset="0"/>
+              </a:rPr>
+              <a:t> </a:t>
+            </a:r>
+            <a:r>
+              <a:rPr lang="en-US" sz="1200" dirty="0" err="1">
+                <a:latin typeface="Arial" panose="020B0604020202020204" pitchFamily="34" charset="0"/>
+                <a:cs typeface="Arial" panose="020B0604020202020204" pitchFamily="34" charset="0"/>
+              </a:rPr>
+              <a:t>pero</a:t>
+            </a:r>
+            <a:r>
+              <a:rPr lang="en-US" sz="1200" dirty="0">
+                <a:latin typeface="Arial" panose="020B0604020202020204" pitchFamily="34" charset="0"/>
+                <a:cs typeface="Arial" panose="020B0604020202020204" pitchFamily="34" charset="0"/>
+              </a:rPr>
+              <a:t> para </a:t>
+            </a:r>
+            <a:r>
+              <a:rPr lang="en-US" sz="1200" dirty="0" err="1">
+                <a:latin typeface="Arial" panose="020B0604020202020204" pitchFamily="34" charset="0"/>
+                <a:cs typeface="Arial" panose="020B0604020202020204" pitchFamily="34" charset="0"/>
+              </a:rPr>
+              <a:t>valores</a:t>
+            </a:r>
+            <a:r>
+              <a:rPr lang="en-US" sz="1200" dirty="0">
+                <a:latin typeface="Arial" panose="020B0604020202020204" pitchFamily="34" charset="0"/>
+                <a:cs typeface="Arial" panose="020B0604020202020204" pitchFamily="34" charset="0"/>
+              </a:rPr>
+              <a:t> </a:t>
+            </a:r>
+            <a:r>
+              <a:rPr lang="en-US" sz="1200" dirty="0" err="1">
+                <a:latin typeface="Arial" panose="020B0604020202020204" pitchFamily="34" charset="0"/>
+                <a:cs typeface="Arial" panose="020B0604020202020204" pitchFamily="34" charset="0"/>
+              </a:rPr>
+              <a:t>mayores</a:t>
+            </a:r>
+            <a:r>
+              <a:rPr lang="en-US" sz="1200" dirty="0">
+                <a:latin typeface="Arial" panose="020B0604020202020204" pitchFamily="34" charset="0"/>
+                <a:cs typeface="Arial" panose="020B0604020202020204" pitchFamily="34" charset="0"/>
+              </a:rPr>
+              <a:t> a 1.6 um.</a:t>
+            </a:r>
           </a:p>
           <a:p>
             <a:pPr algn="just"/>
@@ -5672,6 +6496,36 @@
           </a:p>
         </p:txBody>
       </p:sp>
+      <p:pic>
+        <p:nvPicPr>
+          <p:cNvPr id="5" name="Imagen 4">
+            <a:extLst>
+              <a:ext uri="{FF2B5EF4-FFF2-40B4-BE49-F238E27FC236}">
+                <a16:creationId xmlns:a16="http://schemas.microsoft.com/office/drawing/2014/main" id="{6CD6D3B4-8429-410C-A7AB-10AD9F08F59E}"/>
+              </a:ext>
+            </a:extLst>
+          </p:cNvPr>
+          <p:cNvPicPr>
+            <a:picLocks noChangeAspect="1"/>
+          </p:cNvPicPr>
+          <p:nvPr/>
+        </p:nvPicPr>
+        <p:blipFill>
+          <a:blip r:embed="rId5"/>
+          <a:stretch>
+            <a:fillRect/>
+          </a:stretch>
+        </p:blipFill>
+        <p:spPr>
+          <a:xfrm>
+            <a:off x="3495413" y="1619029"/>
+            <a:ext cx="5201174" cy="3027827"/>
+          </a:xfrm>
+          <a:prstGeom prst="rect">
+            <a:avLst/>
+          </a:prstGeom>
+        </p:spPr>
+      </p:pic>
     </p:spTree>
     <p:extLst>
       <p:ext uri="{BB962C8B-B14F-4D97-AF65-F5344CB8AC3E}">
@@ -5708,8 +6562,8 @@
           <a:chExt cx="0" cy="0"/>
         </a:xfrm>
       </p:grpSpPr>
-      <mc:AlternateContent xmlns:mc="http://schemas.openxmlformats.org/markup-compatibility/2006">
-        <mc:Choice xmlns:a14="http://schemas.microsoft.com/office/drawing/2010/main" Requires="a14">
+      <mc:AlternateContent xmlns:mc="http://schemas.openxmlformats.org/markup-compatibility/2006" xmlns:a14="http://schemas.microsoft.com/office/drawing/2010/main">
+        <mc:Choice Requires="a14">
           <p:sp>
             <p:nvSpPr>
               <p:cNvPr id="16" name="object 16">
@@ -6036,7 +6890,7 @@
             </p:txBody>
           </p:sp>
         </mc:Choice>
-        <mc:Fallback>
+        <mc:Fallback xmlns="">
           <p:sp>
             <p:nvSpPr>
               <p:cNvPr id="16" name="object 16">
@@ -6182,522 +7036,281 @@
           </a:p>
         </p:txBody>
       </p:sp>
-      <mc:AlternateContent xmlns:mc="http://schemas.openxmlformats.org/markup-compatibility/2006" xmlns:a14="http://schemas.microsoft.com/office/drawing/2010/main">
-        <mc:Choice Requires="a14">
-          <p:sp>
-            <p:nvSpPr>
-              <p:cNvPr id="2" name="CuadroTexto 1">
-                <a:extLst>
-                  <a:ext uri="{FF2B5EF4-FFF2-40B4-BE49-F238E27FC236}">
-                    <a16:creationId xmlns:a16="http://schemas.microsoft.com/office/drawing/2014/main" id="{A440F587-93A3-E474-C0B0-883BB9DAFD85}"/>
-                  </a:ext>
-                </a:extLst>
-              </p:cNvPr>
-              <p:cNvSpPr txBox="1"/>
-              <p:nvPr/>
-            </p:nvSpPr>
-            <p:spPr>
-              <a:xfrm>
-                <a:off x="609441" y="4860334"/>
-                <a:ext cx="11198542" cy="1361911"/>
-              </a:xfrm>
-              <a:prstGeom prst="rect">
-                <a:avLst/>
-              </a:prstGeom>
-              <a:solidFill>
-                <a:schemeClr val="bg1">
-                  <a:lumMod val="95000"/>
-                </a:schemeClr>
-              </a:solidFill>
-              <a:ln w="28575">
-                <a:solidFill>
-                  <a:srgbClr val="E0700D"/>
-                </a:solidFill>
-              </a:ln>
-            </p:spPr>
-            <p:txBody>
-              <a:bodyPr wrap="square" rtlCol="0">
-                <a:spAutoFit/>
-              </a:bodyPr>
-              <a:lstStyle/>
-              <a:p>
-                <a:pPr algn="just"/>
-                <a:r>
-                  <a:rPr lang="en-US" sz="1200" dirty="0">
-                    <a:latin typeface="Arial" panose="020B0604020202020204" pitchFamily="34" charset="0"/>
-                    <a:cs typeface="Arial" panose="020B0604020202020204" pitchFamily="34" charset="0"/>
-                  </a:rPr>
-                  <a:t>Find the second-degree polynomial coefficients and relate them with the group index and the dispersion parameter. </a:t>
-                </a:r>
-                <a14:m>
-                  <m:oMath xmlns:m="http://schemas.openxmlformats.org/officeDocument/2006/math">
-                    <m:d>
-                      <m:dPr>
-                        <m:begChr m:val="{"/>
-                        <m:endChr m:val=""/>
-                        <m:ctrlPr>
-                          <a:rPr lang="es-ES" sz="1200" b="0" i="1" smtClean="0">
-                            <a:latin typeface="Cambria Math" panose="02040503050406030204" pitchFamily="18" charset="0"/>
-                            <a:cs typeface="Arial" panose="020B0604020202020204" pitchFamily="34" charset="0"/>
-                          </a:rPr>
-                        </m:ctrlPr>
-                      </m:dPr>
-                      <m:e>
-                        <m:eqArr>
-                          <m:eqArrPr>
-                            <m:ctrlPr>
-                              <a:rPr lang="es-ES" sz="1200" b="0" i="1" smtClean="0">
-                                <a:latin typeface="Cambria Math" panose="02040503050406030204" pitchFamily="18" charset="0"/>
-                                <a:cs typeface="Arial" panose="020B0604020202020204" pitchFamily="34" charset="0"/>
-                              </a:rPr>
-                            </m:ctrlPr>
-                          </m:eqArrPr>
-                          <m:e>
-                            <m:sSub>
-                              <m:sSubPr>
-                                <m:ctrlPr>
-                                  <a:rPr lang="es-ES" sz="1200" b="0" i="1" smtClean="0">
-                                    <a:latin typeface="Cambria Math" panose="02040503050406030204" pitchFamily="18" charset="0"/>
-                                    <a:cs typeface="Arial" panose="020B0604020202020204" pitchFamily="34" charset="0"/>
-                                  </a:rPr>
-                                </m:ctrlPr>
-                              </m:sSubPr>
-                              <m:e>
-                                <m:r>
-                                  <a:rPr lang="es-ES" sz="1200" b="0" i="1" smtClean="0">
-                                    <a:latin typeface="Cambria Math" panose="02040503050406030204" pitchFamily="18" charset="0"/>
-                                    <a:cs typeface="Arial" panose="020B0604020202020204" pitchFamily="34" charset="0"/>
-                                  </a:rPr>
-                                  <m:t>𝑛</m:t>
-                                </m:r>
-                              </m:e>
-                              <m:sub>
-                                <m:r>
-                                  <a:rPr lang="es-ES" sz="1200" b="0" i="1" smtClean="0">
-                                    <a:latin typeface="Cambria Math" panose="02040503050406030204" pitchFamily="18" charset="0"/>
-                                    <a:cs typeface="Arial" panose="020B0604020202020204" pitchFamily="34" charset="0"/>
-                                  </a:rPr>
-                                  <m:t>𝑒𝑓𝑓</m:t>
-                                </m:r>
-                              </m:sub>
-                            </m:sSub>
-                            <m:r>
-                              <a:rPr lang="es-ES" sz="1200" b="0" i="1" smtClean="0">
-                                <a:latin typeface="Cambria Math" panose="02040503050406030204" pitchFamily="18" charset="0"/>
-                                <a:cs typeface="Arial" panose="020B0604020202020204" pitchFamily="34" charset="0"/>
-                              </a:rPr>
-                              <m:t>=</m:t>
-                            </m:r>
-                            <m:sSub>
-                              <m:sSubPr>
-                                <m:ctrlPr>
-                                  <a:rPr lang="es-ES" sz="1200" b="0" i="1" smtClean="0">
-                                    <a:latin typeface="Cambria Math" panose="02040503050406030204" pitchFamily="18" charset="0"/>
-                                    <a:cs typeface="Arial" panose="020B0604020202020204" pitchFamily="34" charset="0"/>
-                                  </a:rPr>
-                                </m:ctrlPr>
-                              </m:sSubPr>
-                              <m:e>
-                                <m:r>
-                                  <a:rPr lang="es-ES" sz="1200" b="0" i="1" smtClean="0">
-                                    <a:latin typeface="Cambria Math" panose="02040503050406030204" pitchFamily="18" charset="0"/>
-                                    <a:cs typeface="Arial" panose="020B0604020202020204" pitchFamily="34" charset="0"/>
-                                  </a:rPr>
-                                  <m:t>𝑛</m:t>
-                                </m:r>
-                              </m:e>
-                              <m:sub>
-                                <m:r>
-                                  <a:rPr lang="es-ES" sz="1200" b="0" i="1" smtClean="0">
-                                    <a:latin typeface="Cambria Math" panose="02040503050406030204" pitchFamily="18" charset="0"/>
-                                    <a:cs typeface="Arial" panose="020B0604020202020204" pitchFamily="34" charset="0"/>
-                                  </a:rPr>
-                                  <m:t>1</m:t>
-                                </m:r>
-                              </m:sub>
-                            </m:sSub>
-                          </m:e>
-                          <m:e>
-                            <m:sSub>
-                              <m:sSubPr>
-                                <m:ctrlPr>
-                                  <a:rPr lang="es-ES" sz="1200" b="0" i="1" smtClean="0">
-                                    <a:latin typeface="Cambria Math" panose="02040503050406030204" pitchFamily="18" charset="0"/>
-                                    <a:cs typeface="Arial" panose="020B0604020202020204" pitchFamily="34" charset="0"/>
-                                  </a:rPr>
-                                </m:ctrlPr>
-                              </m:sSubPr>
-                              <m:e>
-                                <m:r>
-                                  <a:rPr lang="es-ES" sz="1200" b="0" i="1" smtClean="0">
-                                    <a:latin typeface="Cambria Math" panose="02040503050406030204" pitchFamily="18" charset="0"/>
-                                    <a:cs typeface="Arial" panose="020B0604020202020204" pitchFamily="34" charset="0"/>
-                                  </a:rPr>
-                                  <m:t>𝑛</m:t>
-                                </m:r>
-                              </m:e>
-                              <m:sub>
-                                <m:r>
-                                  <a:rPr lang="es-ES" sz="1200" b="0" i="1" smtClean="0">
-                                    <a:latin typeface="Cambria Math" panose="02040503050406030204" pitchFamily="18" charset="0"/>
-                                    <a:cs typeface="Arial" panose="020B0604020202020204" pitchFamily="34" charset="0"/>
-                                  </a:rPr>
-                                  <m:t>𝑔</m:t>
-                                </m:r>
-                              </m:sub>
-                            </m:sSub>
-                            <m:r>
-                              <a:rPr lang="es-ES" sz="1200" b="0" i="1" smtClean="0">
-                                <a:latin typeface="Cambria Math" panose="02040503050406030204" pitchFamily="18" charset="0"/>
-                                <a:cs typeface="Arial" panose="020B0604020202020204" pitchFamily="34" charset="0"/>
-                              </a:rPr>
-                              <m:t>=</m:t>
-                            </m:r>
-                            <m:sSub>
-                              <m:sSubPr>
-                                <m:ctrlPr>
-                                  <a:rPr lang="es-ES" sz="1200" b="0" i="1" smtClean="0">
-                                    <a:latin typeface="Cambria Math" panose="02040503050406030204" pitchFamily="18" charset="0"/>
-                                    <a:cs typeface="Arial" panose="020B0604020202020204" pitchFamily="34" charset="0"/>
-                                  </a:rPr>
-                                </m:ctrlPr>
-                              </m:sSubPr>
-                              <m:e>
-                                <m:r>
-                                  <a:rPr lang="es-ES" sz="1200" b="0" i="1" smtClean="0">
-                                    <a:latin typeface="Cambria Math" panose="02040503050406030204" pitchFamily="18" charset="0"/>
-                                    <a:cs typeface="Arial" panose="020B0604020202020204" pitchFamily="34" charset="0"/>
-                                  </a:rPr>
-                                  <m:t>𝑛</m:t>
-                                </m:r>
-                              </m:e>
-                              <m:sub>
-                                <m:r>
-                                  <a:rPr lang="es-ES" sz="1200" b="0" i="1" smtClean="0">
-                                    <a:latin typeface="Cambria Math" panose="02040503050406030204" pitchFamily="18" charset="0"/>
-                                    <a:cs typeface="Arial" panose="020B0604020202020204" pitchFamily="34" charset="0"/>
-                                  </a:rPr>
-                                  <m:t>1</m:t>
-                                </m:r>
-                              </m:sub>
-                            </m:sSub>
-                            <m:r>
-                              <a:rPr lang="es-ES" sz="1200" b="0" i="1" smtClean="0">
-                                <a:latin typeface="Cambria Math" panose="02040503050406030204" pitchFamily="18" charset="0"/>
-                                <a:cs typeface="Arial" panose="020B0604020202020204" pitchFamily="34" charset="0"/>
-                              </a:rPr>
-                              <m:t>−</m:t>
-                            </m:r>
-                            <m:sSub>
-                              <m:sSubPr>
-                                <m:ctrlPr>
-                                  <a:rPr lang="es-ES" sz="1200" b="0" i="1" smtClean="0">
-                                    <a:latin typeface="Cambria Math" panose="02040503050406030204" pitchFamily="18" charset="0"/>
-                                    <a:cs typeface="Arial" panose="020B0604020202020204" pitchFamily="34" charset="0"/>
-                                  </a:rPr>
-                                </m:ctrlPr>
-                              </m:sSubPr>
-                              <m:e>
-                                <m:r>
-                                  <a:rPr lang="es-ES" sz="1200" b="0" i="1" smtClean="0">
-                                    <a:latin typeface="Cambria Math" panose="02040503050406030204" pitchFamily="18" charset="0"/>
-                                    <a:cs typeface="Arial" panose="020B0604020202020204" pitchFamily="34" charset="0"/>
-                                  </a:rPr>
-                                  <m:t>𝑛</m:t>
-                                </m:r>
-                              </m:e>
-                              <m:sub>
-                                <m:r>
-                                  <a:rPr lang="es-ES" sz="1200" b="0" i="1" smtClean="0">
-                                    <a:latin typeface="Cambria Math" panose="02040503050406030204" pitchFamily="18" charset="0"/>
-                                    <a:cs typeface="Arial" panose="020B0604020202020204" pitchFamily="34" charset="0"/>
-                                  </a:rPr>
-                                  <m:t>2</m:t>
-                                </m:r>
-                              </m:sub>
-                            </m:sSub>
-                            <m:sSub>
-                              <m:sSubPr>
-                                <m:ctrlPr>
-                                  <a:rPr lang="es-ES" sz="1200" b="0" i="1" smtClean="0">
-                                    <a:latin typeface="Cambria Math" panose="02040503050406030204" pitchFamily="18" charset="0"/>
-                                    <a:cs typeface="Arial" panose="020B0604020202020204" pitchFamily="34" charset="0"/>
-                                  </a:rPr>
-                                </m:ctrlPr>
-                              </m:sSubPr>
-                              <m:e>
-                                <m:r>
-                                  <a:rPr lang="es-ES" sz="1200" b="0" i="1" smtClean="0">
-                                    <a:latin typeface="Cambria Math" panose="02040503050406030204" pitchFamily="18" charset="0"/>
-                                    <a:cs typeface="Arial" panose="020B0604020202020204" pitchFamily="34" charset="0"/>
-                                  </a:rPr>
-                                  <m:t>𝜆</m:t>
-                                </m:r>
-                              </m:e>
-                              <m:sub>
-                                <m:r>
-                                  <a:rPr lang="es-ES" sz="1200" b="0" i="1" smtClean="0">
-                                    <a:latin typeface="Cambria Math" panose="02040503050406030204" pitchFamily="18" charset="0"/>
-                                    <a:cs typeface="Arial" panose="020B0604020202020204" pitchFamily="34" charset="0"/>
-                                  </a:rPr>
-                                  <m:t>0</m:t>
-                                </m:r>
-                              </m:sub>
-                            </m:sSub>
-                          </m:e>
-                          <m:e>
-                            <m:r>
-                              <a:rPr lang="es-ES" sz="1200" b="0" i="1" smtClean="0">
-                                <a:latin typeface="Cambria Math" panose="02040503050406030204" pitchFamily="18" charset="0"/>
-                                <a:cs typeface="Arial" panose="020B0604020202020204" pitchFamily="34" charset="0"/>
-                              </a:rPr>
-                              <m:t>𝐷</m:t>
-                            </m:r>
-                            <m:r>
-                              <a:rPr lang="es-ES" sz="1200" b="0" i="1" smtClean="0">
-                                <a:latin typeface="Cambria Math" panose="02040503050406030204" pitchFamily="18" charset="0"/>
-                                <a:cs typeface="Arial" panose="020B0604020202020204" pitchFamily="34" charset="0"/>
-                              </a:rPr>
-                              <m:t>=−</m:t>
-                            </m:r>
-                            <m:f>
-                              <m:fPr>
-                                <m:ctrlPr>
-                                  <a:rPr lang="es-ES" sz="1200" b="0" i="1" smtClean="0">
-                                    <a:latin typeface="Cambria Math" panose="02040503050406030204" pitchFamily="18" charset="0"/>
-                                    <a:cs typeface="Arial" panose="020B0604020202020204" pitchFamily="34" charset="0"/>
-                                  </a:rPr>
-                                </m:ctrlPr>
-                              </m:fPr>
-                              <m:num>
-                                <m:r>
-                                  <a:rPr lang="es-ES" sz="1200" b="0" i="1" smtClean="0">
-                                    <a:latin typeface="Cambria Math" panose="02040503050406030204" pitchFamily="18" charset="0"/>
-                                    <a:cs typeface="Arial" panose="020B0604020202020204" pitchFamily="34" charset="0"/>
-                                  </a:rPr>
-                                  <m:t>2</m:t>
-                                </m:r>
-                                <m:sSub>
-                                  <m:sSubPr>
-                                    <m:ctrlPr>
-                                      <a:rPr lang="es-ES" sz="1200" b="0" i="1" smtClean="0">
-                                        <a:latin typeface="Cambria Math" panose="02040503050406030204" pitchFamily="18" charset="0"/>
-                                        <a:cs typeface="Arial" panose="020B0604020202020204" pitchFamily="34" charset="0"/>
-                                      </a:rPr>
-                                    </m:ctrlPr>
-                                  </m:sSubPr>
-                                  <m:e>
-                                    <m:r>
-                                      <a:rPr lang="es-ES" sz="1200" b="0" i="1" smtClean="0">
-                                        <a:latin typeface="Cambria Math" panose="02040503050406030204" pitchFamily="18" charset="0"/>
-                                        <a:cs typeface="Arial" panose="020B0604020202020204" pitchFamily="34" charset="0"/>
-                                      </a:rPr>
-                                      <m:t>𝜆</m:t>
-                                    </m:r>
-                                  </m:e>
-                                  <m:sub>
-                                    <m:r>
-                                      <a:rPr lang="es-ES" sz="1200" b="0" i="1" smtClean="0">
-                                        <a:latin typeface="Cambria Math" panose="02040503050406030204" pitchFamily="18" charset="0"/>
-                                        <a:cs typeface="Arial" panose="020B0604020202020204" pitchFamily="34" charset="0"/>
-                                      </a:rPr>
-                                      <m:t>0</m:t>
-                                    </m:r>
-                                  </m:sub>
-                                </m:sSub>
-                                <m:sSub>
-                                  <m:sSubPr>
-                                    <m:ctrlPr>
-                                      <a:rPr lang="es-ES" sz="1200" b="0" i="1" smtClean="0">
-                                        <a:latin typeface="Cambria Math" panose="02040503050406030204" pitchFamily="18" charset="0"/>
-                                        <a:cs typeface="Arial" panose="020B0604020202020204" pitchFamily="34" charset="0"/>
-                                      </a:rPr>
-                                    </m:ctrlPr>
-                                  </m:sSubPr>
-                                  <m:e>
-                                    <m:r>
-                                      <a:rPr lang="es-ES" sz="1200" b="0" i="1" smtClean="0">
-                                        <a:latin typeface="Cambria Math" panose="02040503050406030204" pitchFamily="18" charset="0"/>
-                                        <a:cs typeface="Arial" panose="020B0604020202020204" pitchFamily="34" charset="0"/>
-                                      </a:rPr>
-                                      <m:t>𝑛</m:t>
-                                    </m:r>
-                                  </m:e>
-                                  <m:sub>
-                                    <m:r>
-                                      <a:rPr lang="es-ES" sz="1200" b="0" i="1" smtClean="0">
-                                        <a:latin typeface="Cambria Math" panose="02040503050406030204" pitchFamily="18" charset="0"/>
-                                        <a:cs typeface="Arial" panose="020B0604020202020204" pitchFamily="34" charset="0"/>
-                                      </a:rPr>
-                                      <m:t>3</m:t>
-                                    </m:r>
-                                  </m:sub>
-                                </m:sSub>
-                              </m:num>
-                              <m:den>
-                                <m:r>
-                                  <a:rPr lang="es-ES" sz="1200" b="0" i="1" smtClean="0">
-                                    <a:latin typeface="Cambria Math" panose="02040503050406030204" pitchFamily="18" charset="0"/>
-                                    <a:cs typeface="Arial" panose="020B0604020202020204" pitchFamily="34" charset="0"/>
-                                  </a:rPr>
-                                  <m:t>𝑐</m:t>
-                                </m:r>
-                              </m:den>
-                            </m:f>
-                            <m:d>
-                              <m:dPr>
-                                <m:begChr m:val="["/>
-                                <m:endChr m:val="]"/>
-                                <m:ctrlPr>
-                                  <a:rPr lang="es-ES" sz="1200" b="0" i="1" smtClean="0">
-                                    <a:latin typeface="Cambria Math" panose="02040503050406030204" pitchFamily="18" charset="0"/>
-                                    <a:cs typeface="Arial" panose="020B0604020202020204" pitchFamily="34" charset="0"/>
-                                  </a:rPr>
-                                </m:ctrlPr>
-                              </m:dPr>
-                              <m:e>
-                                <m:f>
-                                  <m:fPr>
-                                    <m:ctrlPr>
-                                      <a:rPr lang="es-ES" sz="1200" b="0" i="1" smtClean="0">
-                                        <a:latin typeface="Cambria Math" panose="02040503050406030204" pitchFamily="18" charset="0"/>
-                                        <a:cs typeface="Arial" panose="020B0604020202020204" pitchFamily="34" charset="0"/>
-                                      </a:rPr>
-                                    </m:ctrlPr>
-                                  </m:fPr>
-                                  <m:num>
-                                    <m:sSup>
-                                      <m:sSupPr>
-                                        <m:ctrlPr>
-                                          <a:rPr lang="es-ES" sz="1200" b="0" i="1" smtClean="0">
-                                            <a:latin typeface="Cambria Math" panose="02040503050406030204" pitchFamily="18" charset="0"/>
-                                            <a:cs typeface="Arial" panose="020B0604020202020204" pitchFamily="34" charset="0"/>
-                                          </a:rPr>
-                                        </m:ctrlPr>
-                                      </m:sSupPr>
-                                      <m:e>
-                                        <m:r>
-                                          <a:rPr lang="es-ES" sz="1200" b="0" i="1" smtClean="0">
-                                            <a:latin typeface="Cambria Math" panose="02040503050406030204" pitchFamily="18" charset="0"/>
-                                            <a:cs typeface="Arial" panose="020B0604020202020204" pitchFamily="34" charset="0"/>
-                                          </a:rPr>
-                                          <m:t>𝑠</m:t>
-                                        </m:r>
-                                      </m:e>
-                                      <m:sup>
-                                        <m:r>
-                                          <a:rPr lang="es-ES" sz="1200" b="0" i="1" smtClean="0">
-                                            <a:latin typeface="Cambria Math" panose="02040503050406030204" pitchFamily="18" charset="0"/>
-                                            <a:cs typeface="Arial" panose="020B0604020202020204" pitchFamily="34" charset="0"/>
-                                          </a:rPr>
-                                          <m:t>2</m:t>
-                                        </m:r>
-                                      </m:sup>
-                                    </m:sSup>
-                                  </m:num>
-                                  <m:den>
-                                    <m:r>
-                                      <a:rPr lang="es-ES" sz="1200" b="0" i="1" smtClean="0">
-                                        <a:latin typeface="Cambria Math" panose="02040503050406030204" pitchFamily="18" charset="0"/>
-                                        <a:cs typeface="Arial" panose="020B0604020202020204" pitchFamily="34" charset="0"/>
-                                      </a:rPr>
-                                      <m:t>𝑚</m:t>
-                                    </m:r>
-                                  </m:den>
-                                </m:f>
-                              </m:e>
-                            </m:d>
-                          </m:e>
-                        </m:eqArr>
-                      </m:e>
-                    </m:d>
-                  </m:oMath>
-                </a14:m>
-                <a:endParaRPr lang="es-ES" sz="1200" b="0" dirty="0">
-                  <a:latin typeface="Arial" panose="020B0604020202020204" pitchFamily="34" charset="0"/>
-                  <a:cs typeface="Arial" panose="020B0604020202020204" pitchFamily="34" charset="0"/>
-                </a:endParaRPr>
-              </a:p>
-              <a:p>
-                <a:pPr algn="just"/>
-                <a:r>
-                  <a:rPr lang="en-US" sz="1200" dirty="0">
-                    <a:latin typeface="Arial" panose="020B0604020202020204" pitchFamily="34" charset="0"/>
-                    <a:cs typeface="Arial" panose="020B0604020202020204" pitchFamily="34" charset="0"/>
-                  </a:rPr>
-                  <a:t> </a:t>
-                </a:r>
-              </a:p>
-              <a:p>
-                <a:pPr algn="just"/>
-                <a:r>
-                  <a:rPr lang="en-US" sz="1200" dirty="0">
-                    <a:latin typeface="Arial" panose="020B0604020202020204" pitchFamily="34" charset="0"/>
-                    <a:cs typeface="Arial" panose="020B0604020202020204" pitchFamily="34" charset="0"/>
-                  </a:rPr>
-                  <a:t>Comment on the results found for the TE0 and TM0 for both deep and shallow waveguides. </a:t>
-                </a:r>
-              </a:p>
-              <a:p>
-                <a:pPr algn="just"/>
-                <a:endParaRPr lang="en-US" sz="1200" dirty="0">
-                  <a:latin typeface="Arial" panose="020B0604020202020204" pitchFamily="34" charset="0"/>
-                  <a:cs typeface="Arial" panose="020B0604020202020204" pitchFamily="34" charset="0"/>
-                </a:endParaRPr>
-              </a:p>
-            </p:txBody>
-          </p:sp>
-        </mc:Choice>
-        <mc:Fallback xmlns="">
-          <p:sp>
-            <p:nvSpPr>
-              <p:cNvPr id="2" name="CuadroTexto 1">
-                <a:extLst>
-                  <a:ext uri="{FF2B5EF4-FFF2-40B4-BE49-F238E27FC236}">
-                    <a16:creationId xmlns:a16="http://schemas.microsoft.com/office/drawing/2014/main" id="{A440F587-93A3-E474-C0B0-883BB9DAFD85}"/>
-                  </a:ext>
-                </a:extLst>
-              </p:cNvPr>
-              <p:cNvSpPr txBox="1">
-                <a:spLocks noRot="1" noChangeAspect="1" noMove="1" noResize="1" noEditPoints="1" noAdjustHandles="1" noChangeArrowheads="1" noChangeShapeType="1" noTextEdit="1"/>
-              </p:cNvSpPr>
-              <p:nvPr/>
-            </p:nvSpPr>
-            <p:spPr>
-              <a:xfrm>
-                <a:off x="609441" y="4860334"/>
-                <a:ext cx="11198542" cy="1361911"/>
-              </a:xfrm>
-              <a:prstGeom prst="rect">
-                <a:avLst/>
-              </a:prstGeom>
-              <a:blipFill>
-                <a:blip r:embed="rId6"/>
-                <a:stretch>
-                  <a:fillRect/>
-                </a:stretch>
-              </a:blipFill>
-              <a:ln w="28575">
-                <a:solidFill>
-                  <a:srgbClr val="E0700D"/>
-                </a:solidFill>
-              </a:ln>
-            </p:spPr>
-            <p:txBody>
-              <a:bodyPr/>
-              <a:lstStyle/>
-              <a:p>
-                <a:r>
-                  <a:rPr lang="es-ES">
-                    <a:noFill/>
-                  </a:rPr>
-                  <a:t> </a:t>
-                </a:r>
-              </a:p>
-            </p:txBody>
-          </p:sp>
-        </mc:Fallback>
-      </mc:AlternateContent>
+      <p:sp>
+        <p:nvSpPr>
+          <p:cNvPr id="2" name="CuadroTexto 1">
+            <a:extLst>
+              <a:ext uri="{FF2B5EF4-FFF2-40B4-BE49-F238E27FC236}">
+                <a16:creationId xmlns:a16="http://schemas.microsoft.com/office/drawing/2014/main" id="{A440F587-93A3-E474-C0B0-883BB9DAFD85}"/>
+              </a:ext>
+            </a:extLst>
+          </p:cNvPr>
+          <p:cNvSpPr txBox="1"/>
+          <p:nvPr/>
+        </p:nvSpPr>
+        <p:spPr>
+          <a:xfrm>
+            <a:off x="609441" y="4860334"/>
+            <a:ext cx="11198542" cy="830997"/>
+          </a:xfrm>
+          <a:prstGeom prst="rect">
+            <a:avLst/>
+          </a:prstGeom>
+          <a:solidFill>
+            <a:schemeClr val="bg1">
+              <a:lumMod val="95000"/>
+            </a:schemeClr>
+          </a:solidFill>
+          <a:ln w="28575">
+            <a:solidFill>
+              <a:srgbClr val="E0700D"/>
+            </a:solidFill>
+          </a:ln>
+        </p:spPr>
+        <p:txBody>
+          <a:bodyPr wrap="square" rtlCol="0">
+            <a:spAutoFit/>
+          </a:bodyPr>
+          <a:lstStyle/>
+          <a:p>
+            <a:pPr algn="just"/>
+            <a:r>
+              <a:rPr lang="en-US" sz="1200" dirty="0">
+                <a:latin typeface="Arial" panose="020B0604020202020204" pitchFamily="34" charset="0"/>
+                <a:cs typeface="Arial" panose="020B0604020202020204" pitchFamily="34" charset="0"/>
+              </a:rPr>
+              <a:t>La </a:t>
+            </a:r>
+            <a:r>
+              <a:rPr lang="en-US" sz="1200" dirty="0" err="1">
+                <a:latin typeface="Arial" panose="020B0604020202020204" pitchFamily="34" charset="0"/>
+                <a:cs typeface="Arial" panose="020B0604020202020204" pitchFamily="34" charset="0"/>
+              </a:rPr>
+              <a:t>gráfica</a:t>
+            </a:r>
+            <a:r>
+              <a:rPr lang="en-US" sz="1200" dirty="0">
+                <a:latin typeface="Arial" panose="020B0604020202020204" pitchFamily="34" charset="0"/>
+                <a:cs typeface="Arial" panose="020B0604020202020204" pitchFamily="34" charset="0"/>
+              </a:rPr>
+              <a:t> de la </a:t>
+            </a:r>
+            <a:r>
+              <a:rPr lang="en-US" sz="1200" dirty="0" err="1">
+                <a:latin typeface="Arial" panose="020B0604020202020204" pitchFamily="34" charset="0"/>
+                <a:cs typeface="Arial" panose="020B0604020202020204" pitchFamily="34" charset="0"/>
+              </a:rPr>
+              <a:t>izquierda</a:t>
+            </a:r>
+            <a:r>
+              <a:rPr lang="en-US" sz="1200" dirty="0">
+                <a:latin typeface="Arial" panose="020B0604020202020204" pitchFamily="34" charset="0"/>
+                <a:cs typeface="Arial" panose="020B0604020202020204" pitchFamily="34" charset="0"/>
+              </a:rPr>
+              <a:t> </a:t>
+            </a:r>
+            <a:r>
+              <a:rPr lang="en-US" sz="1200" dirty="0" err="1">
+                <a:latin typeface="Arial" panose="020B0604020202020204" pitchFamily="34" charset="0"/>
+                <a:cs typeface="Arial" panose="020B0604020202020204" pitchFamily="34" charset="0"/>
+              </a:rPr>
+              <a:t>representa</a:t>
+            </a:r>
+            <a:r>
+              <a:rPr lang="en-US" sz="1200" dirty="0">
+                <a:latin typeface="Arial" panose="020B0604020202020204" pitchFamily="34" charset="0"/>
+                <a:cs typeface="Arial" panose="020B0604020202020204" pitchFamily="34" charset="0"/>
+              </a:rPr>
+              <a:t> un deep waveguide y la </a:t>
+            </a:r>
+            <a:r>
+              <a:rPr lang="en-US" sz="1200" dirty="0" err="1">
+                <a:latin typeface="Arial" panose="020B0604020202020204" pitchFamily="34" charset="0"/>
+                <a:cs typeface="Arial" panose="020B0604020202020204" pitchFamily="34" charset="0"/>
+              </a:rPr>
+              <a:t>aproximación</a:t>
+            </a:r>
+            <a:r>
+              <a:rPr lang="en-US" sz="1200" dirty="0">
+                <a:latin typeface="Arial" panose="020B0604020202020204" pitchFamily="34" charset="0"/>
+                <a:cs typeface="Arial" panose="020B0604020202020204" pitchFamily="34" charset="0"/>
+              </a:rPr>
+              <a:t> polynomial de </a:t>
+            </a:r>
+            <a:r>
+              <a:rPr lang="en-US" sz="1200" dirty="0" err="1">
+                <a:latin typeface="Arial" panose="020B0604020202020204" pitchFamily="34" charset="0"/>
+                <a:cs typeface="Arial" panose="020B0604020202020204" pitchFamily="34" charset="0"/>
+              </a:rPr>
+              <a:t>segundo</a:t>
+            </a:r>
+            <a:r>
+              <a:rPr lang="en-US" sz="1200" dirty="0">
+                <a:latin typeface="Arial" panose="020B0604020202020204" pitchFamily="34" charset="0"/>
+                <a:cs typeface="Arial" panose="020B0604020202020204" pitchFamily="34" charset="0"/>
+              </a:rPr>
+              <a:t> </a:t>
+            </a:r>
+            <a:r>
+              <a:rPr lang="en-US" sz="1200" dirty="0" err="1">
+                <a:latin typeface="Arial" panose="020B0604020202020204" pitchFamily="34" charset="0"/>
+                <a:cs typeface="Arial" panose="020B0604020202020204" pitchFamily="34" charset="0"/>
+              </a:rPr>
+              <a:t>orden</a:t>
+            </a:r>
+            <a:r>
+              <a:rPr lang="en-US" sz="1200" dirty="0">
+                <a:latin typeface="Arial" panose="020B0604020202020204" pitchFamily="34" charset="0"/>
+                <a:cs typeface="Arial" panose="020B0604020202020204" pitchFamily="34" charset="0"/>
+              </a:rPr>
+              <a:t>. La de la </a:t>
+            </a:r>
+            <a:r>
+              <a:rPr lang="en-US" sz="1200" dirty="0" err="1">
+                <a:latin typeface="Arial" panose="020B0604020202020204" pitchFamily="34" charset="0"/>
+                <a:cs typeface="Arial" panose="020B0604020202020204" pitchFamily="34" charset="0"/>
+              </a:rPr>
+              <a:t>derecha</a:t>
+            </a:r>
+            <a:r>
+              <a:rPr lang="en-US" sz="1200" dirty="0">
+                <a:latin typeface="Arial" panose="020B0604020202020204" pitchFamily="34" charset="0"/>
+                <a:cs typeface="Arial" panose="020B0604020202020204" pitchFamily="34" charset="0"/>
+              </a:rPr>
+              <a:t> </a:t>
+            </a:r>
+            <a:r>
+              <a:rPr lang="en-US" sz="1200" dirty="0" err="1">
+                <a:latin typeface="Arial" panose="020B0604020202020204" pitchFamily="34" charset="0"/>
+                <a:cs typeface="Arial" panose="020B0604020202020204" pitchFamily="34" charset="0"/>
+              </a:rPr>
+              <a:t>representa</a:t>
+            </a:r>
+            <a:r>
+              <a:rPr lang="en-US" sz="1200" dirty="0">
+                <a:latin typeface="Arial" panose="020B0604020202020204" pitchFamily="34" charset="0"/>
+                <a:cs typeface="Arial" panose="020B0604020202020204" pitchFamily="34" charset="0"/>
+              </a:rPr>
+              <a:t> lo </a:t>
+            </a:r>
+            <a:r>
+              <a:rPr lang="en-US" sz="1200" dirty="0" err="1">
+                <a:latin typeface="Arial" panose="020B0604020202020204" pitchFamily="34" charset="0"/>
+                <a:cs typeface="Arial" panose="020B0604020202020204" pitchFamily="34" charset="0"/>
+              </a:rPr>
+              <a:t>mismo</a:t>
+            </a:r>
+            <a:r>
+              <a:rPr lang="en-US" sz="1200" dirty="0">
+                <a:latin typeface="Arial" panose="020B0604020202020204" pitchFamily="34" charset="0"/>
+                <a:cs typeface="Arial" panose="020B0604020202020204" pitchFamily="34" charset="0"/>
+              </a:rPr>
+              <a:t> </a:t>
+            </a:r>
+            <a:r>
+              <a:rPr lang="en-US" sz="1200" dirty="0" err="1">
+                <a:latin typeface="Arial" panose="020B0604020202020204" pitchFamily="34" charset="0"/>
+                <a:cs typeface="Arial" panose="020B0604020202020204" pitchFamily="34" charset="0"/>
+              </a:rPr>
+              <a:t>pero</a:t>
+            </a:r>
+            <a:r>
+              <a:rPr lang="en-US" sz="1200" dirty="0">
+                <a:latin typeface="Arial" panose="020B0604020202020204" pitchFamily="34" charset="0"/>
+                <a:cs typeface="Arial" panose="020B0604020202020204" pitchFamily="34" charset="0"/>
+              </a:rPr>
+              <a:t> para la shallow.</a:t>
+            </a:r>
+          </a:p>
+          <a:p>
+            <a:pPr algn="just"/>
+            <a:endParaRPr lang="en-US" sz="1200" dirty="0">
+              <a:latin typeface="Arial" panose="020B0604020202020204" pitchFamily="34" charset="0"/>
+              <a:cs typeface="Arial" panose="020B0604020202020204" pitchFamily="34" charset="0"/>
+            </a:endParaRPr>
+          </a:p>
+          <a:p>
+            <a:pPr algn="just"/>
+            <a:r>
+              <a:rPr lang="en-US" sz="1200" dirty="0">
+                <a:latin typeface="Arial" panose="020B0604020202020204" pitchFamily="34" charset="0"/>
+                <a:cs typeface="Arial" panose="020B0604020202020204" pitchFamily="34" charset="0"/>
+              </a:rPr>
+              <a:t>Si se </a:t>
+            </a:r>
+            <a:r>
+              <a:rPr lang="en-US" sz="1200" dirty="0" err="1">
+                <a:latin typeface="Arial" panose="020B0604020202020204" pitchFamily="34" charset="0"/>
+                <a:cs typeface="Arial" panose="020B0604020202020204" pitchFamily="34" charset="0"/>
+              </a:rPr>
+              <a:t>comparan</a:t>
+            </a:r>
+            <a:r>
+              <a:rPr lang="en-US" sz="1200" dirty="0">
+                <a:latin typeface="Arial" panose="020B0604020202020204" pitchFamily="34" charset="0"/>
+                <a:cs typeface="Arial" panose="020B0604020202020204" pitchFamily="34" charset="0"/>
+              </a:rPr>
+              <a:t> </a:t>
+            </a:r>
+            <a:r>
+              <a:rPr lang="en-US" sz="1200" dirty="0" err="1">
+                <a:latin typeface="Arial" panose="020B0604020202020204" pitchFamily="34" charset="0"/>
+                <a:cs typeface="Arial" panose="020B0604020202020204" pitchFamily="34" charset="0"/>
+              </a:rPr>
+              <a:t>llegamos</a:t>
+            </a:r>
+            <a:r>
+              <a:rPr lang="en-US" sz="1200" dirty="0">
+                <a:latin typeface="Arial" panose="020B0604020202020204" pitchFamily="34" charset="0"/>
+                <a:cs typeface="Arial" panose="020B0604020202020204" pitchFamily="34" charset="0"/>
+              </a:rPr>
+              <a:t> a la conclusion de que las waveguides shallow </a:t>
+            </a:r>
+            <a:r>
+              <a:rPr lang="en-US" sz="1200" dirty="0" err="1">
+                <a:latin typeface="Arial" panose="020B0604020202020204" pitchFamily="34" charset="0"/>
+                <a:cs typeface="Arial" panose="020B0604020202020204" pitchFamily="34" charset="0"/>
+              </a:rPr>
+              <a:t>tienen</a:t>
+            </a:r>
+            <a:r>
+              <a:rPr lang="en-US" sz="1200" dirty="0">
+                <a:latin typeface="Arial" panose="020B0604020202020204" pitchFamily="34" charset="0"/>
+                <a:cs typeface="Arial" panose="020B0604020202020204" pitchFamily="34" charset="0"/>
+              </a:rPr>
+              <a:t> un </a:t>
+            </a:r>
+            <a:r>
+              <a:rPr lang="en-US" sz="1200" dirty="0" err="1">
+                <a:latin typeface="Arial" panose="020B0604020202020204" pitchFamily="34" charset="0"/>
+                <a:cs typeface="Arial" panose="020B0604020202020204" pitchFamily="34" charset="0"/>
+              </a:rPr>
+              <a:t>índice</a:t>
+            </a:r>
+            <a:r>
+              <a:rPr lang="en-US" sz="1200" dirty="0">
+                <a:latin typeface="Arial" panose="020B0604020202020204" pitchFamily="34" charset="0"/>
+                <a:cs typeface="Arial" panose="020B0604020202020204" pitchFamily="34" charset="0"/>
+              </a:rPr>
+              <a:t> </a:t>
+            </a:r>
+            <a:r>
+              <a:rPr lang="en-US" sz="1200" dirty="0" err="1">
+                <a:latin typeface="Arial" panose="020B0604020202020204" pitchFamily="34" charset="0"/>
+                <a:cs typeface="Arial" panose="020B0604020202020204" pitchFamily="34" charset="0"/>
+              </a:rPr>
+              <a:t>efectivo</a:t>
+            </a:r>
+            <a:r>
+              <a:rPr lang="en-US" sz="1200" dirty="0">
+                <a:latin typeface="Arial" panose="020B0604020202020204" pitchFamily="34" charset="0"/>
+                <a:cs typeface="Arial" panose="020B0604020202020204" pitchFamily="34" charset="0"/>
+              </a:rPr>
+              <a:t> mayor que los del deep.</a:t>
+            </a:r>
+          </a:p>
+        </p:txBody>
+      </p:sp>
       <p:sp>
         <p:nvSpPr>
           <p:cNvPr id="5" name="Rectángulo 4">
@@ -6802,114 +7415,549 @@
           </a:p>
         </p:txBody>
       </p:sp>
-      <mc:AlternateContent xmlns:mc="http://schemas.openxmlformats.org/markup-compatibility/2006" xmlns:a14="http://schemas.microsoft.com/office/drawing/2010/main">
-        <mc:Choice Requires="a14">
+      <p:sp>
+        <p:nvSpPr>
+          <p:cNvPr id="8" name="CuadroTexto 7">
+            <a:extLst>
+              <a:ext uri="{FF2B5EF4-FFF2-40B4-BE49-F238E27FC236}">
+                <a16:creationId xmlns:a16="http://schemas.microsoft.com/office/drawing/2014/main" id="{0F38E924-A0E7-A039-C837-916BA77FE89B}"/>
+              </a:ext>
+            </a:extLst>
+          </p:cNvPr>
+          <p:cNvSpPr txBox="1"/>
+          <p:nvPr/>
+        </p:nvSpPr>
+        <p:spPr>
+          <a:xfrm>
+            <a:off x="6347361" y="4498712"/>
+            <a:ext cx="5486560" cy="276999"/>
+          </a:xfrm>
+          <a:prstGeom prst="rect">
+            <a:avLst/>
+          </a:prstGeom>
+          <a:noFill/>
+        </p:spPr>
+        <p:txBody>
+          <a:bodyPr wrap="square">
+            <a:spAutoFit/>
+          </a:bodyPr>
+          <a:lstStyle/>
+          <a:p>
+            <a:pPr algn="r"/>
+            <a:r>
+              <a:rPr lang="en-US" sz="1200" b="1" dirty="0">
+                <a:solidFill>
+                  <a:schemeClr val="tx1"/>
+                </a:solidFill>
+                <a:latin typeface="Arial" panose="020B0604020202020204" pitchFamily="34" charset="0"/>
+                <a:cs typeface="Arial" panose="020B0604020202020204" pitchFamily="34" charset="0"/>
+              </a:rPr>
+              <a:t>slab: 150nm</a:t>
+            </a:r>
+            <a:endParaRPr lang="en-US" sz="1200" dirty="0">
+              <a:solidFill>
+                <a:schemeClr val="tx1"/>
+              </a:solidFill>
+              <a:latin typeface="Arial" panose="020B0604020202020204" pitchFamily="34" charset="0"/>
+              <a:cs typeface="Arial" panose="020B0604020202020204" pitchFamily="34" charset="0"/>
+            </a:endParaRPr>
+          </a:p>
+        </p:txBody>
+      </p:sp>
+      <p:pic>
+        <p:nvPicPr>
+          <p:cNvPr id="7" name="Imagen 6">
+            <a:extLst>
+              <a:ext uri="{FF2B5EF4-FFF2-40B4-BE49-F238E27FC236}">
+                <a16:creationId xmlns:a16="http://schemas.microsoft.com/office/drawing/2014/main" id="{80252CE5-9DD1-4F70-B56F-BEE75408AFAF}"/>
+              </a:ext>
+            </a:extLst>
+          </p:cNvPr>
+          <p:cNvPicPr>
+            <a:picLocks noChangeAspect="1"/>
+          </p:cNvPicPr>
+          <p:nvPr/>
+        </p:nvPicPr>
+        <p:blipFill>
+          <a:blip r:embed="rId6"/>
+          <a:stretch>
+            <a:fillRect/>
+          </a:stretch>
+        </p:blipFill>
+        <p:spPr>
+          <a:xfrm>
+            <a:off x="1254840" y="1509426"/>
+            <a:ext cx="4195919" cy="3158927"/>
+          </a:xfrm>
+          <a:prstGeom prst="rect">
+            <a:avLst/>
+          </a:prstGeom>
+        </p:spPr>
+      </p:pic>
+      <p:pic>
+        <p:nvPicPr>
+          <p:cNvPr id="12" name="Imagen 11">
+            <a:extLst>
+              <a:ext uri="{FF2B5EF4-FFF2-40B4-BE49-F238E27FC236}">
+                <a16:creationId xmlns:a16="http://schemas.microsoft.com/office/drawing/2014/main" id="{B33992A7-8F81-4938-8401-71E92F5BF44F}"/>
+              </a:ext>
+            </a:extLst>
+          </p:cNvPr>
+          <p:cNvPicPr>
+            <a:picLocks noChangeAspect="1"/>
+          </p:cNvPicPr>
+          <p:nvPr/>
+        </p:nvPicPr>
+        <p:blipFill>
+          <a:blip r:embed="rId7"/>
+          <a:stretch>
+            <a:fillRect/>
+          </a:stretch>
+        </p:blipFill>
+        <p:spPr>
+          <a:xfrm>
+            <a:off x="6922875" y="1491902"/>
+            <a:ext cx="4283649" cy="3212737"/>
+          </a:xfrm>
+          <a:prstGeom prst="rect">
+            <a:avLst/>
+          </a:prstGeom>
+        </p:spPr>
+      </p:pic>
+    </p:spTree>
+    <p:extLst>
+      <p:ext uri="{BB962C8B-B14F-4D97-AF65-F5344CB8AC3E}">
+        <p14:creationId xmlns:p14="http://schemas.microsoft.com/office/powerpoint/2010/main" val="236054401"/>
+      </p:ext>
+    </p:extLst>
+  </p:cSld>
+  <p:clrMapOvr>
+    <a:masterClrMapping/>
+  </p:clrMapOvr>
+</p:sld>
+</file>
+
+<file path=ppt/slides/slide6.xml><?xml version="1.0" encoding="utf-8"?>
+<p:sld xmlns:a="http://schemas.openxmlformats.org/drawingml/2006/main" xmlns:r="http://schemas.openxmlformats.org/officeDocument/2006/relationships" xmlns:p="http://schemas.openxmlformats.org/presentationml/2006/main">
+  <p:cSld>
+    <p:spTree>
+      <p:nvGrpSpPr>
+        <p:cNvPr id="1" name=""/>
+        <p:cNvGrpSpPr/>
+        <p:nvPr/>
+      </p:nvGrpSpPr>
+      <p:grpSpPr>
+        <a:xfrm>
+          <a:off x="0" y="0"/>
+          <a:ext cx="0" cy="0"/>
+          <a:chOff x="0" y="0"/>
+          <a:chExt cx="0" cy="0"/>
+        </a:xfrm>
+      </p:grpSpPr>
+      <p:sp>
+        <p:nvSpPr>
+          <p:cNvPr id="4" name="Marcador de pie de página 3">
+            <a:extLst>
+              <a:ext uri="{FF2B5EF4-FFF2-40B4-BE49-F238E27FC236}">
+                <a16:creationId xmlns:a16="http://schemas.microsoft.com/office/drawing/2014/main" id="{54400D0B-0A00-4C58-9A9F-F870E590AA90}"/>
+              </a:ext>
+            </a:extLst>
+          </p:cNvPr>
+          <p:cNvSpPr>
+            <a:spLocks noGrp="1"/>
+          </p:cNvSpPr>
+          <p:nvPr>
+            <p:ph type="ftr" sz="quarter" idx="5"/>
+          </p:nvPr>
+        </p:nvSpPr>
+        <p:spPr/>
+        <p:txBody>
+          <a:bodyPr/>
+          <a:lstStyle/>
+          <a:p>
+            <a:pPr marL="12700">
+              <a:spcBef>
+                <a:spcPts val="15"/>
+              </a:spcBef>
+            </a:pPr>
+            <a:r>
+              <a:rPr lang="es-ES" spc="-5"/>
+              <a:t>LAB 1.0. WAVEGUIDES</a:t>
+            </a:r>
+            <a:endParaRPr lang="es-ES" spc="-5" dirty="0"/>
+          </a:p>
+        </p:txBody>
+      </p:sp>
+      <p:sp>
+        <p:nvSpPr>
+          <p:cNvPr id="5" name="Marcador de número de diapositiva 4">
+            <a:extLst>
+              <a:ext uri="{FF2B5EF4-FFF2-40B4-BE49-F238E27FC236}">
+                <a16:creationId xmlns:a16="http://schemas.microsoft.com/office/drawing/2014/main" id="{C0DDFA2E-497F-4050-AF54-5A6E9B79634E}"/>
+              </a:ext>
+            </a:extLst>
+          </p:cNvPr>
+          <p:cNvSpPr>
+            <a:spLocks noGrp="1"/>
+          </p:cNvSpPr>
+          <p:nvPr>
+            <p:ph type="sldNum" sz="quarter" idx="7"/>
+          </p:nvPr>
+        </p:nvSpPr>
+        <p:spPr/>
+        <p:txBody>
+          <a:bodyPr/>
+          <a:lstStyle/>
+          <a:p>
+            <a:fld id="{B6F15528-21DE-4FAA-801E-634DDDAF4B2B}" type="slidenum">
+              <a:rPr lang="es-ES" smtClean="0"/>
+              <a:t>6</a:t>
+            </a:fld>
+            <a:endParaRPr lang="es-ES"/>
+          </a:p>
+        </p:txBody>
+      </p:sp>
+      <mc:AlternateContent xmlns:mc="http://schemas.openxmlformats.org/markup-compatibility/2006">
+        <mc:Choice xmlns:a14="http://schemas.microsoft.com/office/drawing/2010/main" Requires="a14">
           <p:sp>
             <p:nvSpPr>
-              <p:cNvPr id="9" name="CuadroTexto 8">
+              <p:cNvPr id="6" name="object 16">
                 <a:extLst>
                   <a:ext uri="{FF2B5EF4-FFF2-40B4-BE49-F238E27FC236}">
-                    <a16:creationId xmlns:a16="http://schemas.microsoft.com/office/drawing/2014/main" id="{C59B6428-4395-242F-54D8-A9FC610F2D7A}"/>
+                    <a16:creationId xmlns:a16="http://schemas.microsoft.com/office/drawing/2014/main" id="{F276E09C-BE07-4C31-B8E0-54291C701E3C}"/>
                   </a:ext>
                 </a:extLst>
               </p:cNvPr>
-              <p:cNvSpPr txBox="1"/>
+              <p:cNvSpPr txBox="1">
+                <a:spLocks/>
+              </p:cNvSpPr>
               <p:nvPr/>
             </p:nvSpPr>
             <p:spPr>
               <a:xfrm>
-                <a:off x="609440" y="2709096"/>
-                <a:ext cx="5486559" cy="1200329"/>
+                <a:off x="685800" y="408883"/>
+                <a:ext cx="10994410" cy="1071255"/>
               </a:xfrm>
               <a:prstGeom prst="rect">
                 <a:avLst/>
               </a:prstGeom>
-              <a:noFill/>
             </p:spPr>
             <p:txBody>
-              <a:bodyPr wrap="square" rtlCol="0">
+              <a:bodyPr vert="horz" wrap="square" lIns="0" tIns="12700" rIns="0" bIns="0" rtlCol="0">
                 <a:spAutoFit/>
               </a:bodyPr>
-              <a:lstStyle/>
+              <a:lstStyle>
+                <a:lvl1pPr>
+                  <a:defRPr sz="2000" b="1" i="0">
+                    <a:solidFill>
+                      <a:schemeClr val="tx1"/>
+                    </a:solidFill>
+                    <a:latin typeface="Calibri"/>
+                    <a:ea typeface="+mj-ea"/>
+                    <a:cs typeface="Calibri"/>
+                  </a:defRPr>
+                </a:lvl1pPr>
+              </a:lstStyle>
               <a:p>
-                <a:pPr algn="ctr"/>
+                <a:pPr marL="12700">
+                  <a:spcBef>
+                    <a:spcPts val="100"/>
+                  </a:spcBef>
+                </a:pPr>
                 <a:r>
-                  <a:rPr lang="en-US" b="1" dirty="0"/>
-                  <a:t>deep</a:t>
+                  <a:rPr lang="en-US" sz="2500" kern="0" dirty="0"/>
+                  <a:t>Learning outcome #3 – Waveguide compact model</a:t>
                 </a:r>
+                <a:br>
+                  <a:rPr lang="en-US" sz="2500" kern="0" spc="-5" dirty="0">
+                    <a:latin typeface="+mj-lt"/>
+                    <a:cs typeface="Lucida Sans"/>
+                  </a:rPr>
+                </a:br>
                 <a:r>
-                  <a:rPr lang="en-US" dirty="0"/>
-                  <a:t> waveguide</a:t>
+                  <a:rPr lang="en-US" b="0" kern="0" dirty="0"/>
+                  <a:t>Let’s model the waveguide using a second order polynomial: </a:t>
                 </a:r>
-              </a:p>
-              <a:p>
-                <a:pPr algn="ctr"/>
-                <a:endParaRPr lang="en-US" dirty="0"/>
-              </a:p>
-              <a:p>
-                <a:pPr algn="ctr"/>
-                <a:r>
-                  <a:rPr lang="en-US" b="1" dirty="0"/>
-                  <a:t>neff_TE0 vs </a:t>
-                </a:r>
+                <a:br>
+                  <a:rPr lang="en-US" b="0" kern="0" dirty="0"/>
+                </a:br>
                 <a14:m>
-                  <m:oMath xmlns:m="http://schemas.openxmlformats.org/officeDocument/2006/math">
-                    <m:r>
-                      <a:rPr lang="es-ES" b="1" i="1" smtClean="0">
-                        <a:latin typeface="Cambria Math" panose="02040503050406030204" pitchFamily="18" charset="0"/>
-                      </a:rPr>
-                      <m:t>𝝀</m:t>
-                    </m:r>
-                  </m:oMath>
+                  <m:oMathPara xmlns:m="http://schemas.openxmlformats.org/officeDocument/2006/math">
+                    <m:oMathParaPr>
+                      <m:jc m:val="centerGroup"/>
+                    </m:oMathParaPr>
+                    <m:oMath xmlns:m="http://schemas.openxmlformats.org/officeDocument/2006/math">
+                      <m:sSub>
+                        <m:sSubPr>
+                          <m:ctrlPr>
+                            <a:rPr lang="es-ES" b="0" i="1" kern="0" smtClean="0">
+                              <a:latin typeface="Cambria Math" panose="02040503050406030204" pitchFamily="18" charset="0"/>
+                            </a:rPr>
+                          </m:ctrlPr>
+                        </m:sSubPr>
+                        <m:e>
+                          <m:r>
+                            <a:rPr lang="es-ES" b="0" i="1" kern="0" smtClean="0">
+                              <a:latin typeface="Cambria Math" panose="02040503050406030204" pitchFamily="18" charset="0"/>
+                            </a:rPr>
+                            <m:t>𝑛</m:t>
+                          </m:r>
+                        </m:e>
+                        <m:sub>
+                          <m:r>
+                            <a:rPr lang="es-ES" b="0" i="1" kern="0" smtClean="0">
+                              <a:latin typeface="Cambria Math" panose="02040503050406030204" pitchFamily="18" charset="0"/>
+                            </a:rPr>
+                            <m:t>𝑒𝑓𝑓</m:t>
+                          </m:r>
+                        </m:sub>
+                      </m:sSub>
+                      <m:d>
+                        <m:dPr>
+                          <m:ctrlPr>
+                            <a:rPr lang="es-ES" b="0" i="1" kern="0" smtClean="0">
+                              <a:latin typeface="Cambria Math" panose="02040503050406030204" pitchFamily="18" charset="0"/>
+                            </a:rPr>
+                          </m:ctrlPr>
+                        </m:dPr>
+                        <m:e>
+                          <m:r>
+                            <a:rPr lang="es-ES" b="0" i="1" kern="0" smtClean="0">
+                              <a:latin typeface="Cambria Math" panose="02040503050406030204" pitchFamily="18" charset="0"/>
+                            </a:rPr>
+                            <m:t>𝜆</m:t>
+                          </m:r>
+                        </m:e>
+                      </m:d>
+                      <m:r>
+                        <a:rPr lang="es-ES" b="0" i="1" kern="0" smtClean="0">
+                          <a:latin typeface="Cambria Math" panose="02040503050406030204" pitchFamily="18" charset="0"/>
+                        </a:rPr>
+                        <m:t>=</m:t>
+                      </m:r>
+                      <m:sSub>
+                        <m:sSubPr>
+                          <m:ctrlPr>
+                            <a:rPr lang="es-ES" b="0" i="1" kern="0" smtClean="0">
+                              <a:latin typeface="Cambria Math" panose="02040503050406030204" pitchFamily="18" charset="0"/>
+                            </a:rPr>
+                          </m:ctrlPr>
+                        </m:sSubPr>
+                        <m:e>
+                          <m:r>
+                            <a:rPr lang="es-ES" b="0" i="1" kern="0" smtClean="0">
+                              <a:latin typeface="Cambria Math" panose="02040503050406030204" pitchFamily="18" charset="0"/>
+                            </a:rPr>
+                            <m:t>𝑛</m:t>
+                          </m:r>
+                        </m:e>
+                        <m:sub>
+                          <m:r>
+                            <a:rPr lang="es-ES" b="0" i="1" kern="0" smtClean="0">
+                              <a:latin typeface="Cambria Math" panose="02040503050406030204" pitchFamily="18" charset="0"/>
+                            </a:rPr>
+                            <m:t>1</m:t>
+                          </m:r>
+                        </m:sub>
+                      </m:sSub>
+                      <m:r>
+                        <a:rPr lang="es-ES" b="0" i="1" kern="0" smtClean="0">
+                          <a:latin typeface="Cambria Math" panose="02040503050406030204" pitchFamily="18" charset="0"/>
+                        </a:rPr>
+                        <m:t>+</m:t>
+                      </m:r>
+                      <m:sSub>
+                        <m:sSubPr>
+                          <m:ctrlPr>
+                            <a:rPr lang="es-ES" b="0" i="1" kern="0" smtClean="0">
+                              <a:latin typeface="Cambria Math" panose="02040503050406030204" pitchFamily="18" charset="0"/>
+                            </a:rPr>
+                          </m:ctrlPr>
+                        </m:sSubPr>
+                        <m:e>
+                          <m:r>
+                            <a:rPr lang="es-ES" b="0" i="1" kern="0" smtClean="0">
+                              <a:latin typeface="Cambria Math" panose="02040503050406030204" pitchFamily="18" charset="0"/>
+                            </a:rPr>
+                            <m:t>𝑛</m:t>
+                          </m:r>
+                        </m:e>
+                        <m:sub>
+                          <m:r>
+                            <a:rPr lang="es-ES" b="0" i="1" kern="0" smtClean="0">
+                              <a:latin typeface="Cambria Math" panose="02040503050406030204" pitchFamily="18" charset="0"/>
+                            </a:rPr>
+                            <m:t>2</m:t>
+                          </m:r>
+                        </m:sub>
+                      </m:sSub>
+                      <m:d>
+                        <m:dPr>
+                          <m:ctrlPr>
+                            <a:rPr lang="es-ES" b="0" i="1" kern="0" smtClean="0">
+                              <a:latin typeface="Cambria Math" panose="02040503050406030204" pitchFamily="18" charset="0"/>
+                            </a:rPr>
+                          </m:ctrlPr>
+                        </m:dPr>
+                        <m:e>
+                          <m:r>
+                            <a:rPr lang="es-ES" b="0" i="1" kern="0" smtClean="0">
+                              <a:latin typeface="Cambria Math" panose="02040503050406030204" pitchFamily="18" charset="0"/>
+                            </a:rPr>
+                            <m:t>𝜆</m:t>
+                          </m:r>
+                          <m:r>
+                            <a:rPr lang="es-ES" b="0" i="1" kern="0" smtClean="0">
+                              <a:latin typeface="Cambria Math" panose="02040503050406030204" pitchFamily="18" charset="0"/>
+                            </a:rPr>
+                            <m:t>−</m:t>
+                          </m:r>
+                          <m:sSub>
+                            <m:sSubPr>
+                              <m:ctrlPr>
+                                <a:rPr lang="es-ES" b="0" i="1" kern="0" smtClean="0">
+                                  <a:latin typeface="Cambria Math" panose="02040503050406030204" pitchFamily="18" charset="0"/>
+                                </a:rPr>
+                              </m:ctrlPr>
+                            </m:sSubPr>
+                            <m:e>
+                              <m:r>
+                                <a:rPr lang="es-ES" b="0" i="1" kern="0" smtClean="0">
+                                  <a:latin typeface="Cambria Math" panose="02040503050406030204" pitchFamily="18" charset="0"/>
+                                </a:rPr>
+                                <m:t>𝜆</m:t>
+                              </m:r>
+                            </m:e>
+                            <m:sub>
+                              <m:r>
+                                <a:rPr lang="es-ES" b="0" i="1" kern="0" smtClean="0">
+                                  <a:latin typeface="Cambria Math" panose="02040503050406030204" pitchFamily="18" charset="0"/>
+                                </a:rPr>
+                                <m:t>0</m:t>
+                              </m:r>
+                            </m:sub>
+                          </m:sSub>
+                        </m:e>
+                      </m:d>
+                      <m:r>
+                        <a:rPr lang="es-ES" b="0" i="1" kern="0" smtClean="0">
+                          <a:latin typeface="Cambria Math" panose="02040503050406030204" pitchFamily="18" charset="0"/>
+                        </a:rPr>
+                        <m:t>+</m:t>
+                      </m:r>
+                      <m:sSub>
+                        <m:sSubPr>
+                          <m:ctrlPr>
+                            <a:rPr lang="es-ES" b="0" i="1" kern="0" smtClean="0">
+                              <a:latin typeface="Cambria Math" panose="02040503050406030204" pitchFamily="18" charset="0"/>
+                            </a:rPr>
+                          </m:ctrlPr>
+                        </m:sSubPr>
+                        <m:e>
+                          <m:r>
+                            <a:rPr lang="es-ES" b="0" i="1" kern="0" smtClean="0">
+                              <a:latin typeface="Cambria Math" panose="02040503050406030204" pitchFamily="18" charset="0"/>
+                            </a:rPr>
+                            <m:t>𝑛</m:t>
+                          </m:r>
+                        </m:e>
+                        <m:sub>
+                          <m:r>
+                            <a:rPr lang="es-ES" b="0" i="1" kern="0" smtClean="0">
+                              <a:latin typeface="Cambria Math" panose="02040503050406030204" pitchFamily="18" charset="0"/>
+                            </a:rPr>
+                            <m:t>3</m:t>
+                          </m:r>
+                        </m:sub>
+                      </m:sSub>
+                      <m:sSup>
+                        <m:sSupPr>
+                          <m:ctrlPr>
+                            <a:rPr lang="es-ES" b="0" i="1" kern="0" smtClean="0">
+                              <a:latin typeface="Cambria Math" panose="02040503050406030204" pitchFamily="18" charset="0"/>
+                            </a:rPr>
+                          </m:ctrlPr>
+                        </m:sSupPr>
+                        <m:e>
+                          <m:d>
+                            <m:dPr>
+                              <m:ctrlPr>
+                                <a:rPr lang="es-ES" b="0" i="1" kern="0" smtClean="0">
+                                  <a:latin typeface="Cambria Math" panose="02040503050406030204" pitchFamily="18" charset="0"/>
+                                </a:rPr>
+                              </m:ctrlPr>
+                            </m:dPr>
+                            <m:e>
+                              <m:r>
+                                <a:rPr lang="es-ES" b="0" i="1" kern="0" smtClean="0">
+                                  <a:latin typeface="Cambria Math" panose="02040503050406030204" pitchFamily="18" charset="0"/>
+                                </a:rPr>
+                                <m:t>𝜆</m:t>
+                              </m:r>
+                              <m:r>
+                                <a:rPr lang="es-ES" b="0" i="1" kern="0" smtClean="0">
+                                  <a:latin typeface="Cambria Math" panose="02040503050406030204" pitchFamily="18" charset="0"/>
+                                </a:rPr>
+                                <m:t>−</m:t>
+                              </m:r>
+                              <m:sSub>
+                                <m:sSubPr>
+                                  <m:ctrlPr>
+                                    <a:rPr lang="es-ES" b="0" i="1" kern="0" smtClean="0">
+                                      <a:latin typeface="Cambria Math" panose="02040503050406030204" pitchFamily="18" charset="0"/>
+                                    </a:rPr>
+                                  </m:ctrlPr>
+                                </m:sSubPr>
+                                <m:e>
+                                  <m:r>
+                                    <a:rPr lang="es-ES" b="0" i="1" kern="0" smtClean="0">
+                                      <a:latin typeface="Cambria Math" panose="02040503050406030204" pitchFamily="18" charset="0"/>
+                                    </a:rPr>
+                                    <m:t>𝜆</m:t>
+                                  </m:r>
+                                </m:e>
+                                <m:sub>
+                                  <m:r>
+                                    <a:rPr lang="es-ES" b="0" i="1" kern="0" smtClean="0">
+                                      <a:latin typeface="Cambria Math" panose="02040503050406030204" pitchFamily="18" charset="0"/>
+                                    </a:rPr>
+                                    <m:t>0</m:t>
+                                  </m:r>
+                                </m:sub>
+                              </m:sSub>
+                            </m:e>
+                          </m:d>
+                        </m:e>
+                        <m:sup>
+                          <m:r>
+                            <a:rPr lang="es-ES" b="0" i="1" kern="0" smtClean="0">
+                              <a:latin typeface="Cambria Math" panose="02040503050406030204" pitchFamily="18" charset="0"/>
+                            </a:rPr>
+                            <m:t>2</m:t>
+                          </m:r>
+                        </m:sup>
+                      </m:sSup>
+                    </m:oMath>
+                  </m:oMathPara>
                 </a14:m>
-                <a:r>
-                  <a:rPr lang="en-US" b="1" dirty="0"/>
-                  <a:t> </a:t>
-                </a:r>
-                <a:r>
-                  <a:rPr lang="en-US" dirty="0"/>
-                  <a:t>with the second-degree polynomial fit  </a:t>
-                </a:r>
-              </a:p>
-              <a:p>
-                <a:pPr algn="ctr"/>
-                <a:r>
-                  <a:rPr lang="en-US" dirty="0"/>
-                  <a:t>&amp; </a:t>
-                </a:r>
-                <a:r>
-                  <a:rPr lang="en-US" b="1" dirty="0"/>
-                  <a:t>neff_TM0 vs </a:t>
-                </a:r>
-                <a14:m>
-                  <m:oMath xmlns:m="http://schemas.openxmlformats.org/officeDocument/2006/math">
-                    <m:r>
-                      <a:rPr lang="es-ES" b="1" i="1">
-                        <a:latin typeface="Cambria Math" panose="02040503050406030204" pitchFamily="18" charset="0"/>
-                      </a:rPr>
-                      <m:t>𝝀</m:t>
-                    </m:r>
-                  </m:oMath>
-                </a14:m>
-                <a:r>
-                  <a:rPr lang="en-US" b="1" dirty="0"/>
-                  <a:t> </a:t>
-                </a:r>
-                <a:r>
-                  <a:rPr lang="en-US" dirty="0"/>
-                  <a:t>with the second-degree polynomial fit </a:t>
-                </a:r>
+                <a:br>
+                  <a:rPr lang="en-US" b="0" kern="0" dirty="0"/>
+                </a:br>
+                <a:endParaRPr lang="en-US" sz="2500" b="0" kern="0" dirty="0">
+                  <a:latin typeface="+mj-lt"/>
+                  <a:cs typeface="Lucida Sans"/>
+                </a:endParaRPr>
               </a:p>
             </p:txBody>
           </p:sp>
         </mc:Choice>
-        <mc:Fallback xmlns="">
+        <mc:Fallback>
           <p:sp>
             <p:nvSpPr>
-              <p:cNvPr id="9" name="CuadroTexto 8">
+              <p:cNvPr id="6" name="object 16">
                 <a:extLst>
                   <a:ext uri="{FF2B5EF4-FFF2-40B4-BE49-F238E27FC236}">
-                    <a16:creationId xmlns:a16="http://schemas.microsoft.com/office/drawing/2014/main" id="{C59B6428-4395-242F-54D8-A9FC610F2D7A}"/>
+                    <a16:creationId xmlns:a16="http://schemas.microsoft.com/office/drawing/2014/main" id="{F276E09C-BE07-4C31-B8E0-54291C701E3C}"/>
                   </a:ext>
                 </a:extLst>
               </p:cNvPr>
@@ -6920,16 +7968,16 @@
             </p:nvSpPr>
             <p:spPr>
               <a:xfrm>
-                <a:off x="609440" y="2709096"/>
-                <a:ext cx="5486559" cy="1200329"/>
+                <a:off x="685800" y="408883"/>
+                <a:ext cx="10994410" cy="1071255"/>
               </a:xfrm>
               <a:prstGeom prst="rect">
                 <a:avLst/>
               </a:prstGeom>
               <a:blipFill>
-                <a:blip r:embed="rId7"/>
+                <a:blip r:embed="rId2"/>
                 <a:stretch>
-                  <a:fillRect t="-2538" r="-556" b="-7107"/>
+                  <a:fillRect l="-1664" t="-7386" b="-4545"/>
                 </a:stretch>
               </a:blipFill>
             </p:spPr>
@@ -6948,158 +7996,526 @@
           </p:sp>
         </mc:Fallback>
       </mc:AlternateContent>
-      <mc:AlternateContent xmlns:mc="http://schemas.openxmlformats.org/markup-compatibility/2006" xmlns:a14="http://schemas.microsoft.com/office/drawing/2010/main">
-        <mc:Choice Requires="a14">
-          <p:sp>
-            <p:nvSpPr>
-              <p:cNvPr id="10" name="CuadroTexto 9">
+      <p:graphicFrame>
+        <p:nvGraphicFramePr>
+          <p:cNvPr id="7" name="Tabla 7">
+            <a:extLst>
+              <a:ext uri="{FF2B5EF4-FFF2-40B4-BE49-F238E27FC236}">
+                <a16:creationId xmlns:a16="http://schemas.microsoft.com/office/drawing/2014/main" id="{F83AB108-A860-4D1D-A71F-2BC0DC8E784F}"/>
+              </a:ext>
+            </a:extLst>
+          </p:cNvPr>
+          <p:cNvGraphicFramePr>
+            <a:graphicFrameLocks noGrp="1"/>
+          </p:cNvGraphicFramePr>
+          <p:nvPr>
+            <p:extLst>
+              <p:ext uri="{D42A27DB-BD31-4B8C-83A1-F6EECF244321}">
+                <p14:modId xmlns:p14="http://schemas.microsoft.com/office/powerpoint/2010/main" val="5092740"/>
+              </p:ext>
+            </p:extLst>
+          </p:nvPr>
+        </p:nvGraphicFramePr>
+        <p:xfrm>
+          <a:off x="2032000" y="1932214"/>
+          <a:ext cx="8128000" cy="1112520"/>
+        </p:xfrm>
+        <a:graphic>
+          <a:graphicData uri="http://schemas.openxmlformats.org/drawingml/2006/table">
+            <a:tbl>
+              <a:tblPr firstRow="1" bandRow="1">
+                <a:tableStyleId>{5C22544A-7EE6-4342-B048-85BDC9FD1C3A}</a:tableStyleId>
+              </a:tblPr>
+              <a:tblGrid>
+                <a:gridCol w="2032000">
+                  <a:extLst>
+                    <a:ext uri="{9D8B030D-6E8A-4147-A177-3AD203B41FA5}">
+                      <a16:colId xmlns:a16="http://schemas.microsoft.com/office/drawing/2014/main" val="1108413785"/>
+                    </a:ext>
+                  </a:extLst>
+                </a:gridCol>
+                <a:gridCol w="2032000">
+                  <a:extLst>
+                    <a:ext uri="{9D8B030D-6E8A-4147-A177-3AD203B41FA5}">
+                      <a16:colId xmlns:a16="http://schemas.microsoft.com/office/drawing/2014/main" val="40609619"/>
+                    </a:ext>
+                  </a:extLst>
+                </a:gridCol>
+                <a:gridCol w="2032000">
+                  <a:extLst>
+                    <a:ext uri="{9D8B030D-6E8A-4147-A177-3AD203B41FA5}">
+                      <a16:colId xmlns:a16="http://schemas.microsoft.com/office/drawing/2014/main" val="1677428007"/>
+                    </a:ext>
+                  </a:extLst>
+                </a:gridCol>
+                <a:gridCol w="2032000">
+                  <a:extLst>
+                    <a:ext uri="{9D8B030D-6E8A-4147-A177-3AD203B41FA5}">
+                      <a16:colId xmlns:a16="http://schemas.microsoft.com/office/drawing/2014/main" val="1750974062"/>
+                    </a:ext>
+                  </a:extLst>
+                </a:gridCol>
+              </a:tblGrid>
+              <a:tr h="370840">
+                <a:tc>
+                  <a:txBody>
+                    <a:bodyPr/>
+                    <a:lstStyle/>
+                    <a:p>
+                      <a:pPr algn="ctr"/>
+                      <a:r>
+                        <a:rPr lang="es-ES" dirty="0"/>
+                        <a:t>DEEP WAVEGUIDE</a:t>
+                      </a:r>
+                    </a:p>
+                  </a:txBody>
+                  <a:tcPr/>
+                </a:tc>
+                <a:tc>
+                  <a:txBody>
+                    <a:bodyPr/>
+                    <a:lstStyle/>
+                    <a:p>
+                      <a:pPr algn="ctr"/>
+                      <a:r>
+                        <a:rPr lang="es-ES" dirty="0"/>
+                        <a:t>ng</a:t>
+                      </a:r>
+                    </a:p>
+                  </a:txBody>
+                  <a:tcPr/>
+                </a:tc>
+                <a:tc>
+                  <a:txBody>
+                    <a:bodyPr/>
+                    <a:lstStyle/>
+                    <a:p>
+                      <a:pPr algn="ctr"/>
+                      <a:r>
+                        <a:rPr lang="es-ES" dirty="0"/>
+                        <a:t>D</a:t>
+                      </a:r>
+                    </a:p>
+                  </a:txBody>
+                  <a:tcPr/>
+                </a:tc>
+                <a:tc>
+                  <a:txBody>
+                    <a:bodyPr/>
+                    <a:lstStyle/>
+                    <a:p>
+                      <a:pPr algn="ctr"/>
+                      <a:r>
+                        <a:rPr lang="es-ES" dirty="0" err="1"/>
+                        <a:t>N_eff</a:t>
+                      </a:r>
+                      <a:r>
+                        <a:rPr lang="es-ES" dirty="0"/>
+                        <a:t>(lambda0)</a:t>
+                      </a:r>
+                    </a:p>
+                  </a:txBody>
+                  <a:tcPr/>
+                </a:tc>
                 <a:extLst>
-                  <a:ext uri="{FF2B5EF4-FFF2-40B4-BE49-F238E27FC236}">
-                    <a16:creationId xmlns:a16="http://schemas.microsoft.com/office/drawing/2014/main" id="{9320AF78-1FC6-19F4-8E0B-8A414F20C6DE}"/>
+                  <a:ext uri="{0D108BD9-81ED-4DB2-BD59-A6C34878D82A}">
+                    <a16:rowId xmlns:a16="http://schemas.microsoft.com/office/drawing/2014/main" val="3320401758"/>
                   </a:ext>
                 </a:extLst>
-              </p:cNvPr>
-              <p:cNvSpPr txBox="1"/>
-              <p:nvPr/>
-            </p:nvSpPr>
-            <p:spPr>
-              <a:xfrm>
-                <a:off x="6321421" y="2709096"/>
-                <a:ext cx="5486559" cy="1200329"/>
-              </a:xfrm>
-              <a:prstGeom prst="rect">
-                <a:avLst/>
-              </a:prstGeom>
-              <a:noFill/>
-            </p:spPr>
-            <p:txBody>
-              <a:bodyPr wrap="square" rtlCol="0">
-                <a:spAutoFit/>
-              </a:bodyPr>
-              <a:lstStyle/>
-              <a:p>
-                <a:pPr algn="ctr"/>
-                <a:r>
-                  <a:rPr lang="en-US" b="1" dirty="0"/>
-                  <a:t>shallow</a:t>
-                </a:r>
-                <a:r>
-                  <a:rPr lang="en-US" dirty="0"/>
-                  <a:t> waveguide</a:t>
-                </a:r>
-              </a:p>
-              <a:p>
-                <a:pPr algn="ctr"/>
-                <a:endParaRPr lang="en-US" dirty="0"/>
-              </a:p>
-              <a:p>
-                <a:pPr algn="ctr"/>
-                <a:r>
-                  <a:rPr lang="en-US" b="1" dirty="0"/>
-                  <a:t>neff_TE0 vs </a:t>
-                </a:r>
-                <a14:m>
-                  <m:oMath xmlns:m="http://schemas.openxmlformats.org/officeDocument/2006/math">
-                    <m:r>
-                      <a:rPr lang="es-ES" b="1" i="1">
-                        <a:latin typeface="Cambria Math" panose="02040503050406030204" pitchFamily="18" charset="0"/>
-                      </a:rPr>
-                      <m:t>𝝀</m:t>
-                    </m:r>
-                  </m:oMath>
-                </a14:m>
-                <a:r>
-                  <a:rPr lang="en-US" b="1" dirty="0"/>
-                  <a:t> </a:t>
-                </a:r>
-                <a:r>
-                  <a:rPr lang="en-US" dirty="0"/>
-                  <a:t>with the second-degree polynomial fit  </a:t>
-                </a:r>
-              </a:p>
-              <a:p>
-                <a:pPr algn="ctr"/>
-                <a:r>
-                  <a:rPr lang="en-US" dirty="0"/>
-                  <a:t>&amp; </a:t>
-                </a:r>
-                <a:r>
-                  <a:rPr lang="en-US" b="1" dirty="0"/>
-                  <a:t>neff_TM0 vs </a:t>
-                </a:r>
-                <a14:m>
-                  <m:oMath xmlns:m="http://schemas.openxmlformats.org/officeDocument/2006/math">
-                    <m:r>
-                      <a:rPr lang="es-ES" b="1" i="1">
-                        <a:latin typeface="Cambria Math" panose="02040503050406030204" pitchFamily="18" charset="0"/>
-                      </a:rPr>
-                      <m:t>𝝀</m:t>
-                    </m:r>
-                  </m:oMath>
-                </a14:m>
-                <a:r>
-                  <a:rPr lang="en-US" b="1" dirty="0"/>
-                  <a:t> </a:t>
-                </a:r>
-                <a:r>
-                  <a:rPr lang="en-US" dirty="0"/>
-                  <a:t>with the second-degree polynomial fit </a:t>
-                </a:r>
-              </a:p>
-            </p:txBody>
-          </p:sp>
-        </mc:Choice>
-        <mc:Fallback xmlns="">
-          <p:sp>
-            <p:nvSpPr>
-              <p:cNvPr id="10" name="CuadroTexto 9">
+              </a:tr>
+              <a:tr h="370840">
+                <a:tc>
+                  <a:txBody>
+                    <a:bodyPr/>
+                    <a:lstStyle/>
+                    <a:p>
+                      <a:pPr algn="ctr"/>
+                      <a:r>
+                        <a:rPr lang="es-ES" dirty="0"/>
+                        <a:t>TE</a:t>
+                      </a:r>
+                    </a:p>
+                  </a:txBody>
+                  <a:tcPr/>
+                </a:tc>
+                <a:tc>
+                  <a:txBody>
+                    <a:bodyPr/>
+                    <a:lstStyle/>
+                    <a:p>
+                      <a:pPr algn="ctr"/>
+                      <a:r>
+                        <a:rPr lang="es-ES" dirty="0"/>
+                        <a:t>1.9399</a:t>
+                      </a:r>
+                    </a:p>
+                  </a:txBody>
+                  <a:tcPr/>
+                </a:tc>
+                <a:tc>
+                  <a:txBody>
+                    <a:bodyPr/>
+                    <a:lstStyle/>
+                    <a:p>
+                      <a:pPr algn="ctr"/>
+                      <a:r>
+                        <a:rPr lang="es-ES" dirty="0"/>
+                        <a:t>-1.0059e-18</a:t>
+                      </a:r>
+                    </a:p>
+                  </a:txBody>
+                  <a:tcPr/>
+                </a:tc>
+                <a:tc>
+                  <a:txBody>
+                    <a:bodyPr/>
+                    <a:lstStyle/>
+                    <a:p>
+                      <a:pPr algn="ctr"/>
+                      <a:r>
+                        <a:rPr lang="es-ES" dirty="0"/>
+                        <a:t>1.6049</a:t>
+                      </a:r>
+                    </a:p>
+                  </a:txBody>
+                  <a:tcPr/>
+                </a:tc>
                 <a:extLst>
-                  <a:ext uri="{FF2B5EF4-FFF2-40B4-BE49-F238E27FC236}">
-                    <a16:creationId xmlns:a16="http://schemas.microsoft.com/office/drawing/2014/main" id="{9320AF78-1FC6-19F4-8E0B-8A414F20C6DE}"/>
+                  <a:ext uri="{0D108BD9-81ED-4DB2-BD59-A6C34878D82A}">
+                    <a16:rowId xmlns:a16="http://schemas.microsoft.com/office/drawing/2014/main" val="4092033037"/>
                   </a:ext>
                 </a:extLst>
-              </p:cNvPr>
-              <p:cNvSpPr txBox="1">
-                <a:spLocks noRot="1" noChangeAspect="1" noMove="1" noResize="1" noEditPoints="1" noAdjustHandles="1" noChangeArrowheads="1" noChangeShapeType="1" noTextEdit="1"/>
-              </p:cNvSpPr>
-              <p:nvPr/>
-            </p:nvSpPr>
-            <p:spPr>
-              <a:xfrm>
-                <a:off x="6321421" y="2709096"/>
-                <a:ext cx="5486559" cy="1200329"/>
-              </a:xfrm>
-              <a:prstGeom prst="rect">
-                <a:avLst/>
-              </a:prstGeom>
-              <a:blipFill>
-                <a:blip r:embed="rId8"/>
-                <a:stretch>
-                  <a:fillRect t="-2538" r="-556" b="-7107"/>
-                </a:stretch>
-              </a:blipFill>
-            </p:spPr>
-            <p:txBody>
-              <a:bodyPr/>
-              <a:lstStyle/>
-              <a:p>
-                <a:r>
-                  <a:rPr lang="es-ES">
-                    <a:noFill/>
-                  </a:rPr>
-                  <a:t> </a:t>
-                </a:r>
-              </a:p>
-            </p:txBody>
-          </p:sp>
-        </mc:Fallback>
-      </mc:AlternateContent>
-      <p:sp>
-        <p:nvSpPr>
-          <p:cNvPr id="8" name="CuadroTexto 7">
+              </a:tr>
+              <a:tr h="370840">
+                <a:tc>
+                  <a:txBody>
+                    <a:bodyPr/>
+                    <a:lstStyle/>
+                    <a:p>
+                      <a:pPr algn="ctr"/>
+                      <a:r>
+                        <a:rPr lang="es-ES" dirty="0"/>
+                        <a:t>TM</a:t>
+                      </a:r>
+                    </a:p>
+                  </a:txBody>
+                  <a:tcPr/>
+                </a:tc>
+                <a:tc>
+                  <a:txBody>
+                    <a:bodyPr/>
+                    <a:lstStyle/>
+                    <a:p>
+                      <a:pPr algn="ctr"/>
+                      <a:r>
+                        <a:rPr lang="es-ES" dirty="0"/>
+                        <a:t>1.7721</a:t>
+                      </a:r>
+                    </a:p>
+                  </a:txBody>
+                  <a:tcPr/>
+                </a:tc>
+                <a:tc>
+                  <a:txBody>
+                    <a:bodyPr/>
+                    <a:lstStyle/>
+                    <a:p>
+                      <a:pPr algn="ctr"/>
+                      <a:r>
+                        <a:rPr lang="es-ES" dirty="0"/>
+                        <a:t>-1.5895e-18</a:t>
+                      </a:r>
+                    </a:p>
+                  </a:txBody>
+                  <a:tcPr/>
+                </a:tc>
+                <a:tc>
+                  <a:txBody>
+                    <a:bodyPr/>
+                    <a:lstStyle/>
+                    <a:p>
+                      <a:pPr algn="ctr"/>
+                      <a:r>
+                        <a:rPr lang="es-ES" dirty="0"/>
+                        <a:t>1.5272</a:t>
+                      </a:r>
+                    </a:p>
+                  </a:txBody>
+                  <a:tcPr/>
+                </a:tc>
+                <a:extLst>
+                  <a:ext uri="{0D108BD9-81ED-4DB2-BD59-A6C34878D82A}">
+                    <a16:rowId xmlns:a16="http://schemas.microsoft.com/office/drawing/2014/main" val="864500358"/>
+                  </a:ext>
+                </a:extLst>
+              </a:tr>
+            </a:tbl>
+          </a:graphicData>
+        </a:graphic>
+      </p:graphicFrame>
+      <p:graphicFrame>
+        <p:nvGraphicFramePr>
+          <p:cNvPr id="8" name="Tabla 7">
             <a:extLst>
               <a:ext uri="{FF2B5EF4-FFF2-40B4-BE49-F238E27FC236}">
-                <a16:creationId xmlns:a16="http://schemas.microsoft.com/office/drawing/2014/main" id="{0F38E924-A0E7-A039-C837-916BA77FE89B}"/>
+                <a16:creationId xmlns:a16="http://schemas.microsoft.com/office/drawing/2014/main" id="{3F089643-136F-4A62-8A09-4CDD1DC88387}"/>
+              </a:ext>
+            </a:extLst>
+          </p:cNvPr>
+          <p:cNvGraphicFramePr>
+            <a:graphicFrameLocks noGrp="1"/>
+          </p:cNvGraphicFramePr>
+          <p:nvPr>
+            <p:extLst>
+              <p:ext uri="{D42A27DB-BD31-4B8C-83A1-F6EECF244321}">
+                <p14:modId xmlns:p14="http://schemas.microsoft.com/office/powerpoint/2010/main" val="1744358208"/>
+              </p:ext>
+            </p:extLst>
+          </p:nvPr>
+        </p:nvGraphicFramePr>
+        <p:xfrm>
+          <a:off x="2032000" y="3521225"/>
+          <a:ext cx="8128000" cy="1381760"/>
+        </p:xfrm>
+        <a:graphic>
+          <a:graphicData uri="http://schemas.openxmlformats.org/drawingml/2006/table">
+            <a:tbl>
+              <a:tblPr firstRow="1" bandRow="1">
+                <a:tableStyleId>{5C22544A-7EE6-4342-B048-85BDC9FD1C3A}</a:tableStyleId>
+              </a:tblPr>
+              <a:tblGrid>
+                <a:gridCol w="2032000">
+                  <a:extLst>
+                    <a:ext uri="{9D8B030D-6E8A-4147-A177-3AD203B41FA5}">
+                      <a16:colId xmlns:a16="http://schemas.microsoft.com/office/drawing/2014/main" val="1366614174"/>
+                    </a:ext>
+                  </a:extLst>
+                </a:gridCol>
+                <a:gridCol w="2032000">
+                  <a:extLst>
+                    <a:ext uri="{9D8B030D-6E8A-4147-A177-3AD203B41FA5}">
+                      <a16:colId xmlns:a16="http://schemas.microsoft.com/office/drawing/2014/main" val="3385791565"/>
+                    </a:ext>
+                  </a:extLst>
+                </a:gridCol>
+                <a:gridCol w="2032000">
+                  <a:extLst>
+                    <a:ext uri="{9D8B030D-6E8A-4147-A177-3AD203B41FA5}">
+                      <a16:colId xmlns:a16="http://schemas.microsoft.com/office/drawing/2014/main" val="1331337433"/>
+                    </a:ext>
+                  </a:extLst>
+                </a:gridCol>
+                <a:gridCol w="2032000">
+                  <a:extLst>
+                    <a:ext uri="{9D8B030D-6E8A-4147-A177-3AD203B41FA5}">
+                      <a16:colId xmlns:a16="http://schemas.microsoft.com/office/drawing/2014/main" val="3554271922"/>
+                    </a:ext>
+                  </a:extLst>
+                </a:gridCol>
+              </a:tblGrid>
+              <a:tr h="639536">
+                <a:tc>
+                  <a:txBody>
+                    <a:bodyPr/>
+                    <a:lstStyle/>
+                    <a:p>
+                      <a:pPr algn="ctr"/>
+                      <a:r>
+                        <a:rPr lang="es-ES" dirty="0"/>
+                        <a:t>SHALLOW WAVEGUIDE</a:t>
+                      </a:r>
+                    </a:p>
+                  </a:txBody>
+                  <a:tcPr/>
+                </a:tc>
+                <a:tc>
+                  <a:txBody>
+                    <a:bodyPr/>
+                    <a:lstStyle/>
+                    <a:p>
+                      <a:pPr algn="ctr"/>
+                      <a:r>
+                        <a:rPr lang="es-ES" dirty="0"/>
+                        <a:t>ng</a:t>
+                      </a:r>
+                    </a:p>
+                  </a:txBody>
+                  <a:tcPr/>
+                </a:tc>
+                <a:tc>
+                  <a:txBody>
+                    <a:bodyPr/>
+                    <a:lstStyle/>
+                    <a:p>
+                      <a:pPr algn="ctr"/>
+                      <a:r>
+                        <a:rPr lang="es-ES" dirty="0"/>
+                        <a:t>D</a:t>
+                      </a:r>
+                    </a:p>
+                  </a:txBody>
+                  <a:tcPr/>
+                </a:tc>
+                <a:tc>
+                  <a:txBody>
+                    <a:bodyPr/>
+                    <a:lstStyle/>
+                    <a:p>
+                      <a:pPr algn="ctr"/>
+                      <a:r>
+                        <a:rPr lang="es-ES" dirty="0" err="1"/>
+                        <a:t>N_eff</a:t>
+                      </a:r>
+                      <a:r>
+                        <a:rPr lang="es-ES" dirty="0"/>
+                        <a:t>(lambda0)</a:t>
+                      </a:r>
+                    </a:p>
+                  </a:txBody>
+                  <a:tcPr/>
+                </a:tc>
+                <a:extLst>
+                  <a:ext uri="{0D108BD9-81ED-4DB2-BD59-A6C34878D82A}">
+                    <a16:rowId xmlns:a16="http://schemas.microsoft.com/office/drawing/2014/main" val="2193902061"/>
+                  </a:ext>
+                </a:extLst>
+              </a:tr>
+              <a:tr h="370840">
+                <a:tc>
+                  <a:txBody>
+                    <a:bodyPr/>
+                    <a:lstStyle/>
+                    <a:p>
+                      <a:pPr algn="ctr"/>
+                      <a:r>
+                        <a:rPr lang="es-ES" dirty="0"/>
+                        <a:t>TE</a:t>
+                      </a:r>
+                    </a:p>
+                  </a:txBody>
+                  <a:tcPr/>
+                </a:tc>
+                <a:tc>
+                  <a:txBody>
+                    <a:bodyPr/>
+                    <a:lstStyle/>
+                    <a:p>
+                      <a:pPr algn="ctr"/>
+                      <a:r>
+                        <a:rPr lang="es-ES" dirty="0"/>
+                        <a:t>1.9157</a:t>
+                      </a:r>
+                    </a:p>
+                  </a:txBody>
+                  <a:tcPr/>
+                </a:tc>
+                <a:tc>
+                  <a:txBody>
+                    <a:bodyPr/>
+                    <a:lstStyle/>
+                    <a:p>
+                      <a:pPr algn="ctr"/>
+                      <a:r>
+                        <a:rPr lang="es-ES" dirty="0"/>
+                        <a:t>-9.8885e-19</a:t>
+                      </a:r>
+                    </a:p>
+                  </a:txBody>
+                  <a:tcPr/>
+                </a:tc>
+                <a:tc>
+                  <a:txBody>
+                    <a:bodyPr/>
+                    <a:lstStyle/>
+                    <a:p>
+                      <a:pPr algn="ctr"/>
+                      <a:r>
+                        <a:rPr lang="es-ES" dirty="0"/>
+                        <a:t>1.6241</a:t>
+                      </a:r>
+                    </a:p>
+                  </a:txBody>
+                  <a:tcPr/>
+                </a:tc>
+                <a:extLst>
+                  <a:ext uri="{0D108BD9-81ED-4DB2-BD59-A6C34878D82A}">
+                    <a16:rowId xmlns:a16="http://schemas.microsoft.com/office/drawing/2014/main" val="3339021199"/>
+                  </a:ext>
+                </a:extLst>
+              </a:tr>
+              <a:tr h="370840">
+                <a:tc>
+                  <a:txBody>
+                    <a:bodyPr/>
+                    <a:lstStyle/>
+                    <a:p>
+                      <a:pPr algn="ctr"/>
+                      <a:r>
+                        <a:rPr lang="es-ES" dirty="0"/>
+                        <a:t>TM</a:t>
+                      </a:r>
+                    </a:p>
+                  </a:txBody>
+                  <a:tcPr/>
+                </a:tc>
+                <a:tc>
+                  <a:txBody>
+                    <a:bodyPr/>
+                    <a:lstStyle/>
+                    <a:p>
+                      <a:pPr algn="ctr"/>
+                      <a:r>
+                        <a:rPr lang="es-ES" dirty="0"/>
+                        <a:t>1.7475</a:t>
+                      </a:r>
+                    </a:p>
+                  </a:txBody>
+                  <a:tcPr/>
+                </a:tc>
+                <a:tc>
+                  <a:txBody>
+                    <a:bodyPr/>
+                    <a:lstStyle/>
+                    <a:p>
+                      <a:pPr algn="ctr"/>
+                      <a:r>
+                        <a:rPr lang="es-ES" dirty="0"/>
+                        <a:t>-1.5296e-18</a:t>
+                      </a:r>
+                    </a:p>
+                  </a:txBody>
+                  <a:tcPr/>
+                </a:tc>
+                <a:tc>
+                  <a:txBody>
+                    <a:bodyPr/>
+                    <a:lstStyle/>
+                    <a:p>
+                      <a:pPr algn="ctr"/>
+                      <a:r>
+                        <a:rPr lang="es-ES" dirty="0"/>
+                        <a:t>1.5419</a:t>
+                      </a:r>
+                    </a:p>
+                  </a:txBody>
+                  <a:tcPr/>
+                </a:tc>
+                <a:extLst>
+                  <a:ext uri="{0D108BD9-81ED-4DB2-BD59-A6C34878D82A}">
+                    <a16:rowId xmlns:a16="http://schemas.microsoft.com/office/drawing/2014/main" val="3824611089"/>
+                  </a:ext>
+                </a:extLst>
+              </a:tr>
+            </a:tbl>
+          </a:graphicData>
+        </a:graphic>
+      </p:graphicFrame>
+      <p:sp>
+        <p:nvSpPr>
+          <p:cNvPr id="9" name="CuadroTexto 8">
+            <a:extLst>
+              <a:ext uri="{FF2B5EF4-FFF2-40B4-BE49-F238E27FC236}">
+                <a16:creationId xmlns:a16="http://schemas.microsoft.com/office/drawing/2014/main" id="{B97EA8D2-75E0-4224-8EC7-194349EA11E6}"/>
               </a:ext>
             </a:extLst>
           </p:cNvPr>
@@ -7108,8 +8524,8 @@
         </p:nvSpPr>
         <p:spPr>
           <a:xfrm>
-            <a:off x="6347361" y="4498712"/>
-            <a:ext cx="5486560" cy="276999"/>
+            <a:off x="533804" y="5379476"/>
+            <a:ext cx="11124392" cy="646331"/>
           </a:xfrm>
           <a:prstGeom prst="rect">
             <a:avLst/>
@@ -7117,36 +8533,33 @@
           <a:noFill/>
         </p:spPr>
         <p:txBody>
-          <a:bodyPr wrap="square">
+          <a:bodyPr wrap="none" rtlCol="0">
             <a:spAutoFit/>
           </a:bodyPr>
           <a:lstStyle/>
           <a:p>
-            <a:pPr algn="r"/>
-            <a:r>
-              <a:rPr lang="en-US" sz="1200" b="1" dirty="0">
-                <a:solidFill>
-                  <a:schemeClr val="tx1"/>
-                </a:solidFill>
-                <a:latin typeface="Arial" panose="020B0604020202020204" pitchFamily="34" charset="0"/>
-                <a:cs typeface="Arial" panose="020B0604020202020204" pitchFamily="34" charset="0"/>
-              </a:rPr>
-              <a:t>slab: 150nm</a:t>
-            </a:r>
-            <a:endParaRPr lang="en-US" sz="1200" dirty="0">
-              <a:solidFill>
-                <a:schemeClr val="tx1"/>
-              </a:solidFill>
-              <a:latin typeface="Arial" panose="020B0604020202020204" pitchFamily="34" charset="0"/>
-              <a:cs typeface="Arial" panose="020B0604020202020204" pitchFamily="34" charset="0"/>
-            </a:endParaRPr>
+            <a:r>
+              <a:rPr lang="es-ES" dirty="0"/>
+              <a:t>Mirando las tablas, se obtienen valores de ng bastantes parecidos a 2 para los casos TE y a 1.8 para los casos TM, </a:t>
+            </a:r>
+          </a:p>
+          <a:p>
+            <a:r>
+              <a:rPr lang="es-ES" dirty="0"/>
+              <a:t>obtenemos valores de dispersión negativas ya que a medida que aumentamos la longitud de onda disminuye el </a:t>
+            </a:r>
+            <a:r>
+              <a:rPr lang="es-ES" dirty="0" err="1"/>
+              <a:t>n_eff</a:t>
+            </a:r>
+            <a:endParaRPr lang="es-ES" dirty="0"/>
           </a:p>
         </p:txBody>
       </p:sp>
     </p:spTree>
     <p:extLst>
       <p:ext uri="{BB962C8B-B14F-4D97-AF65-F5344CB8AC3E}">
-        <p14:creationId xmlns:p14="http://schemas.microsoft.com/office/powerpoint/2010/main" val="236054401"/>
+        <p14:creationId xmlns:p14="http://schemas.microsoft.com/office/powerpoint/2010/main" val="2818972938"/>
       </p:ext>
     </p:extLst>
   </p:cSld>
@@ -7156,7 +8569,7 @@
 </p:sld>
 </file>
 
-<file path=ppt/slides/slide6.xml><?xml version="1.0" encoding="utf-8"?>
+<file path=ppt/slides/slide7.xml><?xml version="1.0" encoding="utf-8"?>
 <p:sld xmlns:a="http://schemas.openxmlformats.org/drawingml/2006/main" xmlns:r="http://schemas.openxmlformats.org/officeDocument/2006/relationships" xmlns:p="http://schemas.openxmlformats.org/presentationml/2006/main">
   <p:cSld>
     <p:spTree>
@@ -7306,7 +8719,7 @@
           <a:p>
             <a:fld id="{B6F15528-21DE-4FAA-801E-634DDDAF4B2B}" type="slidenum">
               <a:rPr lang="es-ES" smtClean="0"/>
-              <a:t>6</a:t>
+              <a:t>7</a:t>
             </a:fld>
             <a:endParaRPr lang="es-ES"/>
           </a:p>
@@ -7389,15 +8802,232 @@
                 <a:latin typeface="Arial" panose="020B0604020202020204" pitchFamily="34" charset="0"/>
                 <a:cs typeface="Arial" panose="020B0604020202020204" pitchFamily="34" charset="0"/>
               </a:rPr>
-              <a:t>Comment results, which is the safe radius, consider safe means less than 0.1 dB/90º.</a:t>
-            </a:r>
-          </a:p>
-          <a:p>
-            <a:pPr algn="just"/>
-            <a:endParaRPr lang="en-US" sz="1200" u="sng" dirty="0">
-              <a:latin typeface="Arial" panose="020B0604020202020204" pitchFamily="34" charset="0"/>
-              <a:cs typeface="Arial" panose="020B0604020202020204" pitchFamily="34" charset="0"/>
-            </a:endParaRPr>
+              <a:t>Como </a:t>
+            </a:r>
+            <a:r>
+              <a:rPr lang="en-US" sz="1200" dirty="0" err="1">
+                <a:latin typeface="Arial" panose="020B0604020202020204" pitchFamily="34" charset="0"/>
+                <a:cs typeface="Arial" panose="020B0604020202020204" pitchFamily="34" charset="0"/>
+              </a:rPr>
+              <a:t>el</a:t>
+            </a:r>
+            <a:r>
+              <a:rPr lang="en-US" sz="1200" dirty="0">
+                <a:latin typeface="Arial" panose="020B0604020202020204" pitchFamily="34" charset="0"/>
+                <a:cs typeface="Arial" panose="020B0604020202020204" pitchFamily="34" charset="0"/>
+              </a:rPr>
+              <a:t> safe radius es </a:t>
+            </a:r>
+            <a:r>
+              <a:rPr lang="en-US" sz="1200" dirty="0" err="1">
+                <a:latin typeface="Arial" panose="020B0604020202020204" pitchFamily="34" charset="0"/>
+                <a:cs typeface="Arial" panose="020B0604020202020204" pitchFamily="34" charset="0"/>
+              </a:rPr>
+              <a:t>cuando</a:t>
+            </a:r>
+            <a:r>
+              <a:rPr lang="en-US" sz="1200" dirty="0">
+                <a:latin typeface="Arial" panose="020B0604020202020204" pitchFamily="34" charset="0"/>
+                <a:cs typeface="Arial" panose="020B0604020202020204" pitchFamily="34" charset="0"/>
+              </a:rPr>
+              <a:t> temenos una </a:t>
+            </a:r>
+            <a:r>
+              <a:rPr lang="en-US" sz="1200" dirty="0" err="1">
+                <a:latin typeface="Arial" panose="020B0604020202020204" pitchFamily="34" charset="0"/>
+                <a:cs typeface="Arial" panose="020B0604020202020204" pitchFamily="34" charset="0"/>
+              </a:rPr>
+              <a:t>pérdidas</a:t>
+            </a:r>
+            <a:r>
+              <a:rPr lang="en-US" sz="1200" dirty="0">
+                <a:latin typeface="Arial" panose="020B0604020202020204" pitchFamily="34" charset="0"/>
+                <a:cs typeface="Arial" panose="020B0604020202020204" pitchFamily="34" charset="0"/>
+              </a:rPr>
+              <a:t> </a:t>
+            </a:r>
+            <a:r>
+              <a:rPr lang="en-US" sz="1200" dirty="0" err="1">
+                <a:latin typeface="Arial" panose="020B0604020202020204" pitchFamily="34" charset="0"/>
+                <a:cs typeface="Arial" panose="020B0604020202020204" pitchFamily="34" charset="0"/>
+              </a:rPr>
+              <a:t>totales</a:t>
+            </a:r>
+            <a:r>
+              <a:rPr lang="en-US" sz="1200" dirty="0">
+                <a:latin typeface="Arial" panose="020B0604020202020204" pitchFamily="34" charset="0"/>
+                <a:cs typeface="Arial" panose="020B0604020202020204" pitchFamily="34" charset="0"/>
+              </a:rPr>
+              <a:t> por </a:t>
+            </a:r>
+            <a:r>
+              <a:rPr lang="en-US" sz="1200" dirty="0" err="1">
+                <a:latin typeface="Arial" panose="020B0604020202020204" pitchFamily="34" charset="0"/>
+                <a:cs typeface="Arial" panose="020B0604020202020204" pitchFamily="34" charset="0"/>
+              </a:rPr>
+              <a:t>debajo</a:t>
+            </a:r>
+            <a:r>
+              <a:rPr lang="en-US" sz="1200" dirty="0">
+                <a:latin typeface="Arial" panose="020B0604020202020204" pitchFamily="34" charset="0"/>
+                <a:cs typeface="Arial" panose="020B0604020202020204" pitchFamily="34" charset="0"/>
+              </a:rPr>
+              <a:t> de 0.1 dB/90º, </a:t>
+            </a:r>
+            <a:r>
+              <a:rPr lang="en-US" sz="1200" dirty="0" err="1">
+                <a:latin typeface="Arial" panose="020B0604020202020204" pitchFamily="34" charset="0"/>
+                <a:cs typeface="Arial" panose="020B0604020202020204" pitchFamily="34" charset="0"/>
+              </a:rPr>
+              <a:t>el</a:t>
+            </a:r>
+            <a:r>
+              <a:rPr lang="en-US" sz="1200" dirty="0">
+                <a:latin typeface="Arial" panose="020B0604020202020204" pitchFamily="34" charset="0"/>
+                <a:cs typeface="Arial" panose="020B0604020202020204" pitchFamily="34" charset="0"/>
+              </a:rPr>
+              <a:t> valor de R de 25 no </a:t>
+            </a:r>
+            <a:r>
+              <a:rPr lang="en-US" sz="1200" dirty="0" err="1">
+                <a:latin typeface="Arial" panose="020B0604020202020204" pitchFamily="34" charset="0"/>
+                <a:cs typeface="Arial" panose="020B0604020202020204" pitchFamily="34" charset="0"/>
+              </a:rPr>
+              <a:t>cumple</a:t>
+            </a:r>
+            <a:r>
+              <a:rPr lang="en-US" sz="1200" dirty="0">
+                <a:latin typeface="Arial" panose="020B0604020202020204" pitchFamily="34" charset="0"/>
+                <a:cs typeface="Arial" panose="020B0604020202020204" pitchFamily="34" charset="0"/>
+              </a:rPr>
+              <a:t> </a:t>
+            </a:r>
+            <a:r>
+              <a:rPr lang="en-US" sz="1200" dirty="0" err="1">
+                <a:latin typeface="Arial" panose="020B0604020202020204" pitchFamily="34" charset="0"/>
+                <a:cs typeface="Arial" panose="020B0604020202020204" pitchFamily="34" charset="0"/>
+              </a:rPr>
+              <a:t>esta</a:t>
+            </a:r>
+            <a:r>
+              <a:rPr lang="en-US" sz="1200" dirty="0">
+                <a:latin typeface="Arial" panose="020B0604020202020204" pitchFamily="34" charset="0"/>
+                <a:cs typeface="Arial" panose="020B0604020202020204" pitchFamily="34" charset="0"/>
+              </a:rPr>
+              <a:t> </a:t>
+            </a:r>
+            <a:r>
+              <a:rPr lang="en-US" sz="1200" dirty="0" err="1">
+                <a:latin typeface="Arial" panose="020B0604020202020204" pitchFamily="34" charset="0"/>
+                <a:cs typeface="Arial" panose="020B0604020202020204" pitchFamily="34" charset="0"/>
+              </a:rPr>
+              <a:t>condición</a:t>
+            </a:r>
+            <a:r>
+              <a:rPr lang="en-US" sz="1200" dirty="0">
+                <a:latin typeface="Arial" panose="020B0604020202020204" pitchFamily="34" charset="0"/>
+                <a:cs typeface="Arial" panose="020B0604020202020204" pitchFamily="34" charset="0"/>
+              </a:rPr>
+              <a:t> </a:t>
+            </a:r>
+            <a:r>
+              <a:rPr lang="en-US" sz="1200" dirty="0" err="1">
+                <a:latin typeface="Arial" panose="020B0604020202020204" pitchFamily="34" charset="0"/>
+                <a:cs typeface="Arial" panose="020B0604020202020204" pitchFamily="34" charset="0"/>
+              </a:rPr>
+              <a:t>pero</a:t>
+            </a:r>
+            <a:r>
+              <a:rPr lang="en-US" sz="1200" dirty="0">
+                <a:latin typeface="Arial" panose="020B0604020202020204" pitchFamily="34" charset="0"/>
+                <a:cs typeface="Arial" panose="020B0604020202020204" pitchFamily="34" charset="0"/>
+              </a:rPr>
+              <a:t> sin embargo los </a:t>
+            </a:r>
+            <a:r>
+              <a:rPr lang="en-US" sz="1200" dirty="0" err="1">
+                <a:latin typeface="Arial" panose="020B0604020202020204" pitchFamily="34" charset="0"/>
+                <a:cs typeface="Arial" panose="020B0604020202020204" pitchFamily="34" charset="0"/>
+              </a:rPr>
+              <a:t>otros</a:t>
+            </a:r>
+            <a:r>
+              <a:rPr lang="en-US" sz="1200" dirty="0">
+                <a:latin typeface="Arial" panose="020B0604020202020204" pitchFamily="34" charset="0"/>
+                <a:cs typeface="Arial" panose="020B0604020202020204" pitchFamily="34" charset="0"/>
+              </a:rPr>
+              <a:t> </a:t>
+            </a:r>
+            <a:r>
+              <a:rPr lang="en-US" sz="1200" dirty="0" err="1">
+                <a:latin typeface="Arial" panose="020B0604020202020204" pitchFamily="34" charset="0"/>
+                <a:cs typeface="Arial" panose="020B0604020202020204" pitchFamily="34" charset="0"/>
+              </a:rPr>
+              <a:t>valores</a:t>
+            </a:r>
+            <a:r>
+              <a:rPr lang="en-US" sz="1200" dirty="0">
+                <a:latin typeface="Arial" panose="020B0604020202020204" pitchFamily="34" charset="0"/>
+                <a:cs typeface="Arial" panose="020B0604020202020204" pitchFamily="34" charset="0"/>
+              </a:rPr>
+              <a:t> de R </a:t>
+            </a:r>
+            <a:r>
+              <a:rPr lang="en-US" sz="1200" dirty="0" err="1">
+                <a:latin typeface="Arial" panose="020B0604020202020204" pitchFamily="34" charset="0"/>
+                <a:cs typeface="Arial" panose="020B0604020202020204" pitchFamily="34" charset="0"/>
+              </a:rPr>
+              <a:t>si</a:t>
+            </a:r>
+            <a:r>
+              <a:rPr lang="en-US" sz="1200" dirty="0">
+                <a:latin typeface="Arial" panose="020B0604020202020204" pitchFamily="34" charset="0"/>
+                <a:cs typeface="Arial" panose="020B0604020202020204" pitchFamily="34" charset="0"/>
+              </a:rPr>
+              <a:t> </a:t>
+            </a:r>
+            <a:r>
+              <a:rPr lang="en-US" sz="1200" dirty="0" err="1">
+                <a:latin typeface="Arial" panose="020B0604020202020204" pitchFamily="34" charset="0"/>
+                <a:cs typeface="Arial" panose="020B0604020202020204" pitchFamily="34" charset="0"/>
+              </a:rPr>
+              <a:t>quie</a:t>
+            </a:r>
+            <a:r>
+              <a:rPr lang="en-US" sz="1200" dirty="0">
+                <a:latin typeface="Arial" panose="020B0604020202020204" pitchFamily="34" charset="0"/>
+                <a:cs typeface="Arial" panose="020B0604020202020204" pitchFamily="34" charset="0"/>
+              </a:rPr>
+              <a:t> </a:t>
+            </a:r>
+            <a:r>
+              <a:rPr lang="en-US" sz="1200" dirty="0" err="1">
+                <a:latin typeface="Arial" panose="020B0604020202020204" pitchFamily="34" charset="0"/>
+                <a:cs typeface="Arial" panose="020B0604020202020204" pitchFamily="34" charset="0"/>
+              </a:rPr>
+              <a:t>cumplen</a:t>
+            </a:r>
+            <a:r>
+              <a:rPr lang="en-US" sz="1200" dirty="0">
+                <a:latin typeface="Arial" panose="020B0604020202020204" pitchFamily="34" charset="0"/>
+                <a:cs typeface="Arial" panose="020B0604020202020204" pitchFamily="34" charset="0"/>
+              </a:rPr>
+              <a:t> </a:t>
+            </a:r>
+            <a:r>
+              <a:rPr lang="en-US" sz="1200" dirty="0" err="1">
+                <a:latin typeface="Arial" panose="020B0604020202020204" pitchFamily="34" charset="0"/>
+                <a:cs typeface="Arial" panose="020B0604020202020204" pitchFamily="34" charset="0"/>
+              </a:rPr>
+              <a:t>el</a:t>
+            </a:r>
+            <a:r>
+              <a:rPr lang="en-US" sz="1200" dirty="0">
+                <a:latin typeface="Arial" panose="020B0604020202020204" pitchFamily="34" charset="0"/>
+                <a:cs typeface="Arial" panose="020B0604020202020204" pitchFamily="34" charset="0"/>
+              </a:rPr>
+              <a:t> safe radius.</a:t>
+            </a:r>
           </a:p>
           <a:p>
             <a:pPr algn="just"/>
@@ -7714,57 +9344,36 @@
           </a:p>
         </p:txBody>
       </p:sp>
-      <p:sp>
-        <p:nvSpPr>
-          <p:cNvPr id="8" name="CuadroTexto 7">
+      <p:pic>
+        <p:nvPicPr>
+          <p:cNvPr id="17" name="Imagen 16">
             <a:extLst>
               <a:ext uri="{FF2B5EF4-FFF2-40B4-BE49-F238E27FC236}">
-                <a16:creationId xmlns:a16="http://schemas.microsoft.com/office/drawing/2014/main" id="{331EBD86-BA6C-68C9-2D38-FC8CFBA7ADC4}"/>
+                <a16:creationId xmlns:a16="http://schemas.microsoft.com/office/drawing/2014/main" id="{5BE8F0A2-F3DC-4DA1-9EA2-B6253CA38518}"/>
               </a:ext>
             </a:extLst>
           </p:cNvPr>
-          <p:cNvSpPr txBox="1"/>
+          <p:cNvPicPr>
+            <a:picLocks noChangeAspect="1"/>
+          </p:cNvPicPr>
           <p:nvPr/>
-        </p:nvSpPr>
+        </p:nvPicPr>
+        <p:blipFill>
+          <a:blip r:embed="rId6"/>
+          <a:stretch>
+            <a:fillRect/>
+          </a:stretch>
+        </p:blipFill>
         <p:spPr>
           <a:xfrm>
-            <a:off x="2978141" y="2784355"/>
-            <a:ext cx="6235717" cy="923330"/>
+            <a:off x="4058952" y="1522877"/>
+            <a:ext cx="3896265" cy="3077779"/>
           </a:xfrm>
           <a:prstGeom prst="rect">
             <a:avLst/>
           </a:prstGeom>
-          <a:noFill/>
         </p:spPr>
-        <p:txBody>
-          <a:bodyPr wrap="square" rtlCol="0">
-            <a:spAutoFit/>
-          </a:bodyPr>
-          <a:lstStyle/>
-          <a:p>
-            <a:pPr algn="ctr"/>
-            <a:r>
-              <a:rPr lang="en-US" b="1" dirty="0"/>
-              <a:t>deep</a:t>
-            </a:r>
-            <a:r>
-              <a:rPr lang="en-US" dirty="0"/>
-              <a:t> waveguide</a:t>
-            </a:r>
-          </a:p>
-          <a:p>
-            <a:pPr algn="ctr"/>
-            <a:endParaRPr lang="en-US" dirty="0"/>
-          </a:p>
-          <a:p>
-            <a:pPr algn="ctr"/>
-            <a:r>
-              <a:rPr lang="en-US" dirty="0"/>
-              <a:t>Paste dB/90º neff_TE0 &amp; neff_TM0 vs R</a:t>
-            </a:r>
-          </a:p>
-        </p:txBody>
-      </p:sp>
+      </p:pic>
     </p:spTree>
     <p:extLst>
       <p:ext uri="{BB962C8B-B14F-4D97-AF65-F5344CB8AC3E}">
@@ -7778,7 +9387,7 @@
 </p:sld>
 </file>
 
-<file path=ppt/slides/slide7.xml><?xml version="1.0" encoding="utf-8"?>
+<file path=ppt/slides/slide8.xml><?xml version="1.0" encoding="utf-8"?>
 <p:sld xmlns:a="http://schemas.openxmlformats.org/drawingml/2006/main" xmlns:r="http://schemas.openxmlformats.org/officeDocument/2006/relationships" xmlns:p="http://schemas.openxmlformats.org/presentationml/2006/main">
   <p:cSld>
     <p:spTree>
@@ -7917,7 +9526,7 @@
           <a:p>
             <a:fld id="{B6F15528-21DE-4FAA-801E-634DDDAF4B2B}" type="slidenum">
               <a:rPr lang="es-ES" smtClean="0"/>
-              <a:t>7</a:t>
+              <a:t>8</a:t>
             </a:fld>
             <a:endParaRPr lang="es-ES"/>
           </a:p>
